--- a/docs/IT工单系统-培训材料.pptx
+++ b/docs/IT工单系统-培训材料.pptx
@@ -3266,7 +3266,7 @@
               </a:defRPr>
             </a:pPr>
             <a:r>
-              <a:t>IT工单系统</a:t>
+              <a:t>IT工单系统 · 培训材料</a:t>
             </a:r>
           </a:p>
         </p:txBody>
@@ -3442,52 +3442,52 @@
               </a:defRPr>
             </a:pPr>
             <a:r>
-              <a:t>  🔴 紧急  4 小时内</a:t>
-            </a:r>
-          </a:p>
-          <a:p>
-            <a:pPr>
-              <a:spcAft>
-                <a:spcPts val="600"/>
-              </a:spcAft>
-              <a:defRPr sz="1600">
-                <a:solidFill>
-                  <a:srgbClr val="1E293B"/>
-                </a:solidFill>
-              </a:defRPr>
-            </a:pPr>
-            <a:r>
-              <a:t>  🟠 高    8 小时内</a:t>
-            </a:r>
-          </a:p>
-          <a:p>
-            <a:pPr>
-              <a:spcAft>
-                <a:spcPts val="600"/>
-              </a:spcAft>
-              <a:defRPr sz="1600">
-                <a:solidFill>
-                  <a:srgbClr val="1E293B"/>
-                </a:solidFill>
-              </a:defRPr>
-            </a:pPr>
-            <a:r>
-              <a:t>  🟡 中   24 小时内</a:t>
-            </a:r>
-          </a:p>
-          <a:p>
-            <a:pPr>
-              <a:spcAft>
-                <a:spcPts val="600"/>
-              </a:spcAft>
-              <a:defRPr sz="1600">
-                <a:solidFill>
-                  <a:srgbClr val="1E293B"/>
-                </a:solidFill>
-              </a:defRPr>
-            </a:pPr>
-            <a:r>
-              <a:t>  🟢 低   48 小时内</a:t>
+              <a:t>  🔴 紧急  1 小时内</a:t>
+            </a:r>
+          </a:p>
+          <a:p>
+            <a:pPr>
+              <a:spcAft>
+                <a:spcPts val="600"/>
+              </a:spcAft>
+              <a:defRPr sz="1600">
+                <a:solidFill>
+                  <a:srgbClr val="1E293B"/>
+                </a:solidFill>
+              </a:defRPr>
+            </a:pPr>
+            <a:r>
+              <a:t>  🟠 高    2 小时内</a:t>
+            </a:r>
+          </a:p>
+          <a:p>
+            <a:pPr>
+              <a:spcAft>
+                <a:spcPts val="600"/>
+              </a:spcAft>
+              <a:defRPr sz="1600">
+                <a:solidFill>
+                  <a:srgbClr val="1E293B"/>
+                </a:solidFill>
+              </a:defRPr>
+            </a:pPr>
+            <a:r>
+              <a:t>  🟡 中    4 小时内</a:t>
+            </a:r>
+          </a:p>
+          <a:p>
+            <a:pPr>
+              <a:spcAft>
+                <a:spcPts val="600"/>
+              </a:spcAft>
+              <a:defRPr sz="1600">
+                <a:solidFill>
+                  <a:srgbClr val="1E293B"/>
+                </a:solidFill>
+              </a:defRPr>
+            </a:pPr>
+            <a:r>
+              <a:t>  🟢 低    8 小时内</a:t>
             </a:r>
           </a:p>
           <a:p>
@@ -3601,37 +3601,94 @@
               </a:defRPr>
             </a:pPr>
             <a:r>
-              <a:t>  周五 16:00 提交（SLA 4小时）</a:t>
-            </a:r>
-          </a:p>
-          <a:p>
-            <a:pPr>
-              <a:spcAft>
-                <a:spcPts val="600"/>
-              </a:spcAft>
-              <a:defRPr sz="1600">
-                <a:solidFill>
-                  <a:srgbClr val="1E293B"/>
-                </a:solidFill>
-              </a:defRPr>
-            </a:pPr>
-            <a:r>
-              <a:t>  → 16:00-17:00 (1h) → 下周一 08:00-11:00 (3h)</a:t>
-            </a:r>
-          </a:p>
-          <a:p>
-            <a:pPr>
-              <a:spcAft>
-                <a:spcPts val="600"/>
-              </a:spcAft>
-              <a:defRPr sz="1600">
-                <a:solidFill>
-                  <a:srgbClr val="1E293B"/>
-                </a:solidFill>
-              </a:defRPr>
-            </a:pPr>
-            <a:r>
-              <a:t>  → SLA到期：下周一 11:00</a:t>
+              <a:t>  周五 16:00 提交（SLA 1小时，紧急）</a:t>
+            </a:r>
+          </a:p>
+          <a:p>
+            <a:pPr>
+              <a:spcAft>
+                <a:spcPts val="600"/>
+              </a:spcAft>
+              <a:defRPr sz="1600">
+                <a:solidFill>
+                  <a:srgbClr val="1E293B"/>
+                </a:solidFill>
+              </a:defRPr>
+            </a:pPr>
+            <a:r>
+              <a:t>  → 16:00-17:00 (1h)</a:t>
+            </a:r>
+          </a:p>
+          <a:p>
+            <a:pPr>
+              <a:spcAft>
+                <a:spcPts val="600"/>
+              </a:spcAft>
+              <a:defRPr sz="1600">
+                <a:solidFill>
+                  <a:srgbClr val="1E293B"/>
+                </a:solidFill>
+              </a:defRPr>
+            </a:pPr>
+            <a:r>
+              <a:t>  → SLA到期：当天 17:00（恰好够用）</a:t>
+            </a:r>
+          </a:p>
+          <a:p>
+            <a:pPr>
+              <a:spcAft>
+                <a:spcPts val="600"/>
+              </a:spcAft>
+              <a:defRPr sz="1600">
+                <a:solidFill>
+                  <a:srgbClr val="1E293B"/>
+                </a:solidFill>
+              </a:defRPr>
+            </a:pPr>
+          </a:p>
+          <a:p>
+            <a:pPr>
+              <a:spcAft>
+                <a:spcPts val="600"/>
+              </a:spcAft>
+              <a:defRPr sz="1600">
+                <a:solidFill>
+                  <a:srgbClr val="1E293B"/>
+                </a:solidFill>
+              </a:defRPr>
+            </a:pPr>
+            <a:r>
+              <a:t>  周五 14:00 提交（SLA 4小时，中）</a:t>
+            </a:r>
+          </a:p>
+          <a:p>
+            <a:pPr>
+              <a:spcAft>
+                <a:spcPts val="600"/>
+              </a:spcAft>
+              <a:defRPr sz="1600">
+                <a:solidFill>
+                  <a:srgbClr val="1E293B"/>
+                </a:solidFill>
+              </a:defRPr>
+            </a:pPr>
+            <a:r>
+              <a:t>  → 14:00-17:00 (3h) → 下周一 08:00-09:00 (1h)</a:t>
+            </a:r>
+          </a:p>
+          <a:p>
+            <a:pPr>
+              <a:spcAft>
+                <a:spcPts val="600"/>
+              </a:spcAft>
+              <a:defRPr sz="1600">
+                <a:solidFill>
+                  <a:srgbClr val="1E293B"/>
+                </a:solidFill>
+              </a:defRPr>
+            </a:pPr>
+            <a:r>
+              <a:t>  → SLA到期：下周一 09:00</a:t>
             </a:r>
           </a:p>
         </p:txBody>
@@ -3666,7 +3723,7 @@
               </a:defRPr>
             </a:pPr>
             <a:r>
-              <a:t>IT工单系统</a:t>
+              <a:t>IT工单系统 · 培训材料</a:t>
             </a:r>
           </a:p>
         </p:txBody>
@@ -3979,7 +4036,7 @@
               </a:defRPr>
             </a:pPr>
             <a:r>
-              <a:t>IT工单系统</a:t>
+              <a:t>IT工单系统 · 培训材料</a:t>
             </a:r>
           </a:p>
         </p:txBody>
@@ -4382,7 +4439,7 @@
               </a:defRPr>
             </a:pPr>
             <a:r>
-              <a:t>IT工单系统</a:t>
+              <a:t>IT工单系统 · 培训材料</a:t>
             </a:r>
           </a:p>
         </p:txBody>
@@ -4785,7 +4842,7 @@
               </a:defRPr>
             </a:pPr>
             <a:r>
-              <a:t>IT工单系统</a:t>
+              <a:t>IT工单系统 · 培训材料</a:t>
             </a:r>
           </a:p>
         </p:txBody>
@@ -5164,7 +5221,7 @@
               </a:defRPr>
             </a:pPr>
             <a:r>
-              <a:t>IT工单系统</a:t>
+              <a:t>IT工单系统 · 培训材料</a:t>
             </a:r>
           </a:p>
         </p:txBody>
@@ -5792,7 +5849,7 @@
               </a:defRPr>
             </a:pPr>
             <a:r>
-              <a:t>IT工单系统</a:t>
+              <a:t>IT工单系统 · 培训材料</a:t>
             </a:r>
           </a:p>
         </p:txBody>
@@ -6135,7 +6192,7 @@
               </a:defRPr>
             </a:pPr>
             <a:r>
-              <a:t>IT工单系统</a:t>
+              <a:t>IT工单系统 · 培训材料</a:t>
             </a:r>
           </a:p>
         </p:txBody>
@@ -6475,7 +6532,7 @@
               </a:defRPr>
             </a:pPr>
             <a:r>
-              <a:t>IT工单系统</a:t>
+              <a:t>IT工单系统 · 培训材料</a:t>
             </a:r>
           </a:p>
         </p:txBody>
@@ -6815,7 +6872,7 @@
               </a:defRPr>
             </a:pPr>
             <a:r>
-              <a:t>IT工单系统</a:t>
+              <a:t>IT工单系统 · 培训材料</a:t>
             </a:r>
           </a:p>
         </p:txBody>
@@ -7116,7 +7173,7 @@
               </a:defRPr>
             </a:pPr>
             <a:r>
-              <a:t>IT工单系统</a:t>
+              <a:t>IT工单系统 · 培训材料</a:t>
             </a:r>
           </a:p>
         </p:txBody>
@@ -7411,7 +7468,7 @@
               </a:defRPr>
             </a:pPr>
             <a:r>
-              <a:t>IT工单系统</a:t>
+              <a:t>IT工单系统 · 培训材料</a:t>
             </a:r>
           </a:p>
         </p:txBody>
@@ -7727,7 +7784,7 @@
               </a:defRPr>
             </a:pPr>
             <a:r>
-              <a:t>IT工单系统</a:t>
+              <a:t>IT工单系统 · 培训材料</a:t>
             </a:r>
           </a:p>
         </p:txBody>

--- a/docs/IT工单系统-培训材料.pptx
+++ b/docs/IT工单系统-培训材料.pptx
@@ -3132,7 +3132,7 @@
           </a:bodyPr>
           <a:lstStyle/>
           <a:p>
-            <a:pPr algn="l">
+            <a:pPr>
               <a:defRPr sz="5200" b="1">
                 <a:solidFill>
                   <a:srgbClr val="FFFFFF"/>
@@ -3154,7 +3154,7 @@
         <p:spPr>
           <a:xfrm>
             <a:off x="457200" y="2926080"/>
-            <a:ext cx="10972800" cy="731520"/>
+            <a:ext cx="10972800" cy="1828800"/>
           </a:xfrm>
           <a:prstGeom prst="rect">
             <a:avLst/>
@@ -3179,6 +3179,48 @@
             </a:pPr>
             <a:r>
               <a:t>培训材料</a:t>
+            </a:r>
+          </a:p>
+          <a:p>
+            <a:pPr>
+              <a:spcAft>
+                <a:spcPts val="600"/>
+              </a:spcAft>
+              <a:defRPr sz="2800">
+                <a:solidFill>
+                  <a:srgbClr val="3B82F6"/>
+                </a:solidFill>
+              </a:defRPr>
+            </a:pPr>
+          </a:p>
+          <a:p>
+            <a:pPr>
+              <a:spcAft>
+                <a:spcPts val="600"/>
+              </a:spcAft>
+              <a:defRPr sz="2800">
+                <a:solidFill>
+                  <a:srgbClr val="3B82F6"/>
+                </a:solidFill>
+              </a:defRPr>
+            </a:pPr>
+            <a:r>
+              <a:t>适用于：制造企业 IT 服务台</a:t>
+            </a:r>
+          </a:p>
+          <a:p>
+            <a:pPr>
+              <a:spcAft>
+                <a:spcPts val="600"/>
+              </a:spcAft>
+              <a:defRPr sz="2800">
+                <a:solidFill>
+                  <a:srgbClr val="3B82F6"/>
+                </a:solidFill>
+              </a:defRPr>
+            </a:pPr>
+            <a:r>
+              <a:t>演示版本 v1.0</a:t>
             </a:r>
           </a:p>
         </p:txBody>
@@ -3215,24 +3257,6 @@
                 </a:solidFill>
               </a:defRPr>
             </a:pPr>
-            <a:r>
-              <a:t>适用于：制造企业 IT 服务台</a:t>
-            </a:r>
-          </a:p>
-          <a:p>
-            <a:pPr>
-              <a:spcAft>
-                <a:spcPts val="600"/>
-              </a:spcAft>
-              <a:defRPr sz="1600">
-                <a:solidFill>
-                  <a:srgbClr val="6B7280"/>
-                </a:solidFill>
-              </a:defRPr>
-            </a:pPr>
-            <a:r>
-              <a:t>演示版本 v1.0</a:t>
-            </a:r>
           </a:p>
         </p:txBody>
       </p:sp>
@@ -3245,7 +3269,7 @@
         <p:spPr>
           <a:xfrm>
             <a:off x="457200" y="6309360"/>
-            <a:ext cx="5486400" cy="365760"/>
+            <a:ext cx="10972800" cy="365760"/>
           </a:xfrm>
           <a:prstGeom prst="rect">
             <a:avLst/>
@@ -3266,42 +3290,7 @@
               </a:defRPr>
             </a:pPr>
             <a:r>
-              <a:t>IT工单系统 · 培训材料</a:t>
-            </a:r>
-          </a:p>
-        </p:txBody>
-      </p:sp>
-      <p:sp>
-        <p:nvSpPr>
-          <p:cNvPr id="6" name="TextBox 5"/>
-          <p:cNvSpPr txBox="1"/>
-          <p:nvPr/>
-        </p:nvSpPr>
-        <p:spPr>
-          <a:xfrm>
-            <a:off x="10058400" y="6309360"/>
-            <a:ext cx="1828800" cy="365760"/>
-          </a:xfrm>
-          <a:prstGeom prst="rect">
-            <a:avLst/>
-          </a:prstGeom>
-          <a:noFill/>
-        </p:spPr>
-        <p:txBody>
-          <a:bodyPr wrap="none">
-            <a:spAutoFit/>
-          </a:bodyPr>
-          <a:lstStyle/>
-          <a:p>
-            <a:pPr algn="r">
-              <a:defRPr sz="1100">
-                <a:solidFill>
-                  <a:srgbClr val="6B7280"/>
-                </a:solidFill>
-              </a:defRPr>
-            </a:pPr>
-            <a:r>
-              <a:t>1</a:t>
+              <a:t>IT工单系统 · 培训材料          1</a:t>
             </a:r>
           </a:p>
         </p:txBody>
@@ -3354,7 +3343,7 @@
           </a:bodyPr>
           <a:lstStyle/>
           <a:p>
-            <a:pPr algn="l">
+            <a:pPr>
               <a:defRPr sz="3200" b="1">
                 <a:solidFill>
                   <a:srgbClr val="1E293B"/>
@@ -3616,22 +3605,7 @@
               </a:defRPr>
             </a:pPr>
             <a:r>
-              <a:t>  → 16:00-17:00 (1h)</a:t>
-            </a:r>
-          </a:p>
-          <a:p>
-            <a:pPr>
-              <a:spcAft>
-                <a:spcPts val="600"/>
-              </a:spcAft>
-              <a:defRPr sz="1600">
-                <a:solidFill>
-                  <a:srgbClr val="1E293B"/>
-                </a:solidFill>
-              </a:defRPr>
-            </a:pPr>
-            <a:r>
-              <a:t>  → SLA到期：当天 17:00（恰好够用）</a:t>
+              <a:t>  → 16:00-17:00 (1h) → SLA到期：当天 17:00</a:t>
             </a:r>
           </a:p>
           <a:p>
@@ -3702,7 +3676,7 @@
         <p:spPr>
           <a:xfrm>
             <a:off x="457200" y="6309360"/>
-            <a:ext cx="5486400" cy="365760"/>
+            <a:ext cx="10972800" cy="365760"/>
           </a:xfrm>
           <a:prstGeom prst="rect">
             <a:avLst/>
@@ -3723,42 +3697,7 @@
               </a:defRPr>
             </a:pPr>
             <a:r>
-              <a:t>IT工单系统 · 培训材料</a:t>
-            </a:r>
-          </a:p>
-        </p:txBody>
-      </p:sp>
-      <p:sp>
-        <p:nvSpPr>
-          <p:cNvPr id="5" name="TextBox 4"/>
-          <p:cNvSpPr txBox="1"/>
-          <p:nvPr/>
-        </p:nvSpPr>
-        <p:spPr>
-          <a:xfrm>
-            <a:off x="10058400" y="6309360"/>
-            <a:ext cx="1828800" cy="365760"/>
-          </a:xfrm>
-          <a:prstGeom prst="rect">
-            <a:avLst/>
-          </a:prstGeom>
-          <a:noFill/>
-        </p:spPr>
-        <p:txBody>
-          <a:bodyPr wrap="none">
-            <a:spAutoFit/>
-          </a:bodyPr>
-          <a:lstStyle/>
-          <a:p>
-            <a:pPr algn="r">
-              <a:defRPr sz="1100">
-                <a:solidFill>
-                  <a:srgbClr val="6B7280"/>
-                </a:solidFill>
-              </a:defRPr>
-            </a:pPr>
-            <a:r>
-              <a:t>10</a:t>
+              <a:t>IT工单系统 · 培训材料          10</a:t>
             </a:r>
           </a:p>
         </p:txBody>
@@ -3811,7 +3750,7 @@
           </a:bodyPr>
           <a:lstStyle/>
           <a:p>
-            <a:pPr algn="l">
+            <a:pPr>
               <a:defRPr sz="3200" b="1">
                 <a:solidFill>
                   <a:srgbClr val="1E293B"/>
@@ -4015,7 +3954,7 @@
         <p:spPr>
           <a:xfrm>
             <a:off x="457200" y="6309360"/>
-            <a:ext cx="5486400" cy="365760"/>
+            <a:ext cx="10972800" cy="365760"/>
           </a:xfrm>
           <a:prstGeom prst="rect">
             <a:avLst/>
@@ -4036,42 +3975,7 @@
               </a:defRPr>
             </a:pPr>
             <a:r>
-              <a:t>IT工单系统 · 培训材料</a:t>
-            </a:r>
-          </a:p>
-        </p:txBody>
-      </p:sp>
-      <p:sp>
-        <p:nvSpPr>
-          <p:cNvPr id="5" name="TextBox 4"/>
-          <p:cNvSpPr txBox="1"/>
-          <p:nvPr/>
-        </p:nvSpPr>
-        <p:spPr>
-          <a:xfrm>
-            <a:off x="10058400" y="6309360"/>
-            <a:ext cx="1828800" cy="365760"/>
-          </a:xfrm>
-          <a:prstGeom prst="rect">
-            <a:avLst/>
-          </a:prstGeom>
-          <a:noFill/>
-        </p:spPr>
-        <p:txBody>
-          <a:bodyPr wrap="none">
-            <a:spAutoFit/>
-          </a:bodyPr>
-          <a:lstStyle/>
-          <a:p>
-            <a:pPr algn="r">
-              <a:defRPr sz="1100">
-                <a:solidFill>
-                  <a:srgbClr val="6B7280"/>
-                </a:solidFill>
-              </a:defRPr>
-            </a:pPr>
-            <a:r>
-              <a:t>11</a:t>
+              <a:t>IT工单系统 · 培训材料          11</a:t>
             </a:r>
           </a:p>
         </p:txBody>
@@ -4124,7 +4028,7 @@
           </a:bodyPr>
           <a:lstStyle/>
           <a:p>
-            <a:pPr algn="l">
+            <a:pPr>
               <a:defRPr sz="3200" b="1">
                 <a:solidFill>
                   <a:srgbClr val="1E293B"/>
@@ -4245,7 +4149,7 @@
               </a:defRPr>
             </a:pPr>
             <a:r>
-              <a:t>  ⑤ 记住工单编号（如 IT-2026-2042）</a:t>
+              <a:t>  ⑤ 记住工单编号</a:t>
             </a:r>
           </a:p>
           <a:p>
@@ -4418,7 +4322,7 @@
         <p:spPr>
           <a:xfrm>
             <a:off x="457200" y="6309360"/>
-            <a:ext cx="5486400" cy="365760"/>
+            <a:ext cx="10972800" cy="365760"/>
           </a:xfrm>
           <a:prstGeom prst="rect">
             <a:avLst/>
@@ -4439,42 +4343,7 @@
               </a:defRPr>
             </a:pPr>
             <a:r>
-              <a:t>IT工单系统 · 培训材料</a:t>
-            </a:r>
-          </a:p>
-        </p:txBody>
-      </p:sp>
-      <p:sp>
-        <p:nvSpPr>
-          <p:cNvPr id="5" name="TextBox 4"/>
-          <p:cNvSpPr txBox="1"/>
-          <p:nvPr/>
-        </p:nvSpPr>
-        <p:spPr>
-          <a:xfrm>
-            <a:off x="10058400" y="6309360"/>
-            <a:ext cx="1828800" cy="365760"/>
-          </a:xfrm>
-          <a:prstGeom prst="rect">
-            <a:avLst/>
-          </a:prstGeom>
-          <a:noFill/>
-        </p:spPr>
-        <p:txBody>
-          <a:bodyPr wrap="none">
-            <a:spAutoFit/>
-          </a:bodyPr>
-          <a:lstStyle/>
-          <a:p>
-            <a:pPr algn="r">
-              <a:defRPr sz="1100">
-                <a:solidFill>
-                  <a:srgbClr val="6B7280"/>
-                </a:solidFill>
-              </a:defRPr>
-            </a:pPr>
-            <a:r>
-              <a:t>12</a:t>
+              <a:t>IT工单系统 · 培训材料          12</a:t>
             </a:r>
           </a:p>
         </p:txBody>
@@ -4527,7 +4396,7 @@
           </a:bodyPr>
           <a:lstStyle/>
           <a:p>
-            <a:pPr algn="l">
+            <a:pPr>
               <a:defRPr sz="3200" b="1">
                 <a:solidFill>
                   <a:srgbClr val="1E293B"/>
@@ -4705,37 +4574,7 @@
               </a:defRPr>
             </a:pPr>
             <a:r>
-              <a:t>  ③ 接收人完成后，双方排行榜数据更新</a:t>
-            </a:r>
-          </a:p>
-          <a:p>
-            <a:pPr>
-              <a:spcAft>
-                <a:spcPts val="600"/>
-              </a:spcAft>
-              <a:defRPr sz="1600">
-                <a:solidFill>
-                  <a:srgbClr val="1E293B"/>
-                </a:solidFill>
-              </a:defRPr>
-            </a:pPr>
-            <a:r>
-              <a:t>    - 原处理人：升级发出 +1</a:t>
-            </a:r>
-          </a:p>
-          <a:p>
-            <a:pPr>
-              <a:spcAft>
-                <a:spcPts val="600"/>
-              </a:spcAft>
-              <a:defRPr sz="1600">
-                <a:solidFill>
-                  <a:srgbClr val="1E293B"/>
-                </a:solidFill>
-              </a:defRPr>
-            </a:pPr>
-            <a:r>
-              <a:t>    - 接收人：接收升级 +1（+2分）</a:t>
+              <a:t>  ③ 接收人完成后，排行榜更新：接收人 +2分/件</a:t>
             </a:r>
           </a:p>
           <a:p>
@@ -4807,7 +4646,7 @@
               </a:defRPr>
             </a:pPr>
             <a:r>
-              <a:t>  ③ 退回次数 +1（-1分）</a:t>
+              <a:t>  ③ 退回次数 +1 → 退回分 -1（最低0分）</a:t>
             </a:r>
           </a:p>
         </p:txBody>
@@ -4821,7 +4660,7 @@
         <p:spPr>
           <a:xfrm>
             <a:off x="457200" y="6309360"/>
-            <a:ext cx="5486400" cy="365760"/>
+            <a:ext cx="10972800" cy="365760"/>
           </a:xfrm>
           <a:prstGeom prst="rect">
             <a:avLst/>
@@ -4842,42 +4681,7 @@
               </a:defRPr>
             </a:pPr>
             <a:r>
-              <a:t>IT工单系统 · 培训材料</a:t>
-            </a:r>
-          </a:p>
-        </p:txBody>
-      </p:sp>
-      <p:sp>
-        <p:nvSpPr>
-          <p:cNvPr id="5" name="TextBox 4"/>
-          <p:cNvSpPr txBox="1"/>
-          <p:nvPr/>
-        </p:nvSpPr>
-        <p:spPr>
-          <a:xfrm>
-            <a:off x="10058400" y="6309360"/>
-            <a:ext cx="1828800" cy="365760"/>
-          </a:xfrm>
-          <a:prstGeom prst="rect">
-            <a:avLst/>
-          </a:prstGeom>
-          <a:noFill/>
-        </p:spPr>
-        <p:txBody>
-          <a:bodyPr wrap="none">
-            <a:spAutoFit/>
-          </a:bodyPr>
-          <a:lstStyle/>
-          <a:p>
-            <a:pPr algn="r">
-              <a:defRPr sz="1100">
-                <a:solidFill>
-                  <a:srgbClr val="6B7280"/>
-                </a:solidFill>
-              </a:defRPr>
-            </a:pPr>
-            <a:r>
-              <a:t>13</a:t>
+              <a:t>IT工单系统 · 培训材料          13</a:t>
             </a:r>
           </a:p>
         </p:txBody>
@@ -4930,7 +4734,7 @@
           </a:bodyPr>
           <a:lstStyle/>
           <a:p>
-            <a:pPr algn="l">
+            <a:pPr>
               <a:defRPr sz="3200" b="1">
                 <a:solidFill>
                   <a:srgbClr val="1E293B"/>
@@ -5200,7 +5004,7 @@
         <p:spPr>
           <a:xfrm>
             <a:off x="457200" y="6309360"/>
-            <a:ext cx="5486400" cy="365760"/>
+            <a:ext cx="10972800" cy="365760"/>
           </a:xfrm>
           <a:prstGeom prst="rect">
             <a:avLst/>
@@ -5221,42 +5025,7 @@
               </a:defRPr>
             </a:pPr>
             <a:r>
-              <a:t>IT工单系统 · 培训材料</a:t>
-            </a:r>
-          </a:p>
-        </p:txBody>
-      </p:sp>
-      <p:sp>
-        <p:nvSpPr>
-          <p:cNvPr id="5" name="TextBox 4"/>
-          <p:cNvSpPr txBox="1"/>
-          <p:nvPr/>
-        </p:nvSpPr>
-        <p:spPr>
-          <a:xfrm>
-            <a:off x="10058400" y="6309360"/>
-            <a:ext cx="1828800" cy="365760"/>
-          </a:xfrm>
-          <a:prstGeom prst="rect">
-            <a:avLst/>
-          </a:prstGeom>
-          <a:noFill/>
-        </p:spPr>
-        <p:txBody>
-          <a:bodyPr wrap="none">
-            <a:spAutoFit/>
-          </a:bodyPr>
-          <a:lstStyle/>
-          <a:p>
-            <a:pPr algn="r">
-              <a:defRPr sz="1100">
-                <a:solidFill>
-                  <a:srgbClr val="6B7280"/>
-                </a:solidFill>
-              </a:defRPr>
-            </a:pPr>
-            <a:r>
-              <a:t>14</a:t>
+              <a:t>IT工单系统 · 培训材料          14</a:t>
             </a:r>
           </a:p>
         </p:txBody>
@@ -5309,7 +5078,7 @@
           </a:bodyPr>
           <a:lstStyle/>
           <a:p>
-            <a:pPr algn="l">
+            <a:pPr>
               <a:defRPr sz="5600" b="1">
                 <a:solidFill>
                   <a:srgbClr val="FFFFFF"/>
@@ -5383,6 +5152,41 @@
             </a:pPr>
             <a:r>
               <a:t>如有疑问，请参考用户操作手册或联系管理员</a:t>
+            </a:r>
+          </a:p>
+        </p:txBody>
+      </p:sp>
+      <p:sp>
+        <p:nvSpPr>
+          <p:cNvPr id="4" name="TextBox 3"/>
+          <p:cNvSpPr txBox="1"/>
+          <p:nvPr/>
+        </p:nvSpPr>
+        <p:spPr>
+          <a:xfrm>
+            <a:off x="457200" y="6309360"/>
+            <a:ext cx="10972800" cy="365760"/>
+          </a:xfrm>
+          <a:prstGeom prst="rect">
+            <a:avLst/>
+          </a:prstGeom>
+          <a:noFill/>
+        </p:spPr>
+        <p:txBody>
+          <a:bodyPr wrap="none">
+            <a:spAutoFit/>
+          </a:bodyPr>
+          <a:lstStyle/>
+          <a:p>
+            <a:pPr>
+              <a:defRPr sz="1100">
+                <a:solidFill>
+                  <a:srgbClr val="6B7280"/>
+                </a:solidFill>
+              </a:defRPr>
+            </a:pPr>
+            <a:r>
+              <a:t>IT工单系统 · 培训材料          15</a:t>
             </a:r>
           </a:p>
         </p:txBody>
@@ -5435,7 +5239,7 @@
           </a:bodyPr>
           <a:lstStyle/>
           <a:p>
-            <a:pPr algn="l">
+            <a:pPr>
               <a:defRPr sz="3200" b="1">
                 <a:solidFill>
                   <a:srgbClr val="1E293B"/>
@@ -5456,8 +5260,8 @@
         </p:nvSpPr>
         <p:spPr>
           <a:xfrm>
-            <a:off x="1371600" y="1645920"/>
-            <a:ext cx="9144000" cy="4572000"/>
+            <a:off x="914400" y="1463040"/>
+            <a:ext cx="10058400" cy="4572000"/>
           </a:xfrm>
           <a:prstGeom prst="rect">
             <a:avLst/>
@@ -5474,7 +5278,7 @@
               <a:spcAft>
                 <a:spcPts val="600"/>
               </a:spcAft>
-              <a:defRPr sz="2000">
+              <a:defRPr sz="1600">
                 <a:solidFill>
                   <a:srgbClr val="1E293B"/>
                 </a:solidFill>
@@ -5489,7 +5293,7 @@
               <a:spcAft>
                 <a:spcPts val="600"/>
               </a:spcAft>
-              <a:defRPr sz="2000">
+              <a:defRPr sz="1600">
                 <a:solidFill>
                   <a:srgbClr val="1E293B"/>
                 </a:solidFill>
@@ -5504,7 +5308,7 @@
               <a:spcAft>
                 <a:spcPts val="600"/>
               </a:spcAft>
-              <a:defRPr sz="2000">
+              <a:defRPr sz="1600">
                 <a:solidFill>
                   <a:srgbClr val="1E293B"/>
                 </a:solidFill>
@@ -5519,7 +5323,7 @@
               <a:spcAft>
                 <a:spcPts val="600"/>
               </a:spcAft>
-              <a:defRPr sz="2000">
+              <a:defRPr sz="1600">
                 <a:solidFill>
                   <a:srgbClr val="1E293B"/>
                 </a:solidFill>
@@ -5534,7 +5338,7 @@
               <a:spcAft>
                 <a:spcPts val="600"/>
               </a:spcAft>
-              <a:defRPr sz="2000">
+              <a:defRPr sz="1600">
                 <a:solidFill>
                   <a:srgbClr val="1E293B"/>
                 </a:solidFill>
@@ -5549,7 +5353,7 @@
               <a:spcAft>
                 <a:spcPts val="600"/>
               </a:spcAft>
-              <a:defRPr sz="2000">
+              <a:defRPr sz="1600">
                 <a:solidFill>
                   <a:srgbClr val="1E293B"/>
                 </a:solidFill>
@@ -5564,7 +5368,7 @@
               <a:spcAft>
                 <a:spcPts val="600"/>
               </a:spcAft>
-              <a:defRPr sz="2000">
+              <a:defRPr sz="1600">
                 <a:solidFill>
                   <a:srgbClr val="1E293B"/>
                 </a:solidFill>
@@ -5579,7 +5383,7 @@
               <a:spcAft>
                 <a:spcPts val="600"/>
               </a:spcAft>
-              <a:defRPr sz="2000">
+              <a:defRPr sz="1600">
                 <a:solidFill>
                   <a:srgbClr val="1E293B"/>
                 </a:solidFill>
@@ -5587,6 +5391,41 @@
             </a:pPr>
             <a:r>
               <a:t>08  常见问题与支持</a:t>
+            </a:r>
+          </a:p>
+        </p:txBody>
+      </p:sp>
+      <p:sp>
+        <p:nvSpPr>
+          <p:cNvPr id="4" name="TextBox 3"/>
+          <p:cNvSpPr txBox="1"/>
+          <p:nvPr/>
+        </p:nvSpPr>
+        <p:spPr>
+          <a:xfrm>
+            <a:off x="457200" y="6309360"/>
+            <a:ext cx="10972800" cy="365760"/>
+          </a:xfrm>
+          <a:prstGeom prst="rect">
+            <a:avLst/>
+          </a:prstGeom>
+          <a:noFill/>
+        </p:spPr>
+        <p:txBody>
+          <a:bodyPr wrap="none">
+            <a:spAutoFit/>
+          </a:bodyPr>
+          <a:lstStyle/>
+          <a:p>
+            <a:pPr>
+              <a:defRPr sz="1100">
+                <a:solidFill>
+                  <a:srgbClr val="6B7280"/>
+                </a:solidFill>
+              </a:defRPr>
+            </a:pPr>
+            <a:r>
+              <a:t>IT工单系统 · 培训材料          2</a:t>
             </a:r>
           </a:p>
         </p:txBody>
@@ -5639,7 +5478,7 @@
           </a:bodyPr>
           <a:lstStyle/>
           <a:p>
-            <a:pPr algn="l">
+            <a:pPr>
               <a:defRPr sz="3200" b="1">
                 <a:solidFill>
                   <a:srgbClr val="1E293B"/>
@@ -5828,7 +5667,7 @@
         <p:spPr>
           <a:xfrm>
             <a:off x="457200" y="6309360"/>
-            <a:ext cx="5486400" cy="365760"/>
+            <a:ext cx="10972800" cy="365760"/>
           </a:xfrm>
           <a:prstGeom prst="rect">
             <a:avLst/>
@@ -5849,42 +5688,7 @@
               </a:defRPr>
             </a:pPr>
             <a:r>
-              <a:t>IT工单系统 · 培训材料</a:t>
-            </a:r>
-          </a:p>
-        </p:txBody>
-      </p:sp>
-      <p:sp>
-        <p:nvSpPr>
-          <p:cNvPr id="5" name="TextBox 4"/>
-          <p:cNvSpPr txBox="1"/>
-          <p:nvPr/>
-        </p:nvSpPr>
-        <p:spPr>
-          <a:xfrm>
-            <a:off x="10058400" y="6309360"/>
-            <a:ext cx="1828800" cy="365760"/>
-          </a:xfrm>
-          <a:prstGeom prst="rect">
-            <a:avLst/>
-          </a:prstGeom>
-          <a:noFill/>
-        </p:spPr>
-        <p:txBody>
-          <a:bodyPr wrap="none">
-            <a:spAutoFit/>
-          </a:bodyPr>
-          <a:lstStyle/>
-          <a:p>
-            <a:pPr algn="r">
-              <a:defRPr sz="1100">
-                <a:solidFill>
-                  <a:srgbClr val="6B7280"/>
-                </a:solidFill>
-              </a:defRPr>
-            </a:pPr>
-            <a:r>
-              <a:t>3</a:t>
+              <a:t>IT工单系统 · 培训材料          3</a:t>
             </a:r>
           </a:p>
         </p:txBody>
@@ -5937,7 +5741,7 @@
           </a:bodyPr>
           <a:lstStyle/>
           <a:p>
-            <a:pPr algn="l">
+            <a:pPr>
               <a:defRPr sz="3200" b="1">
                 <a:solidFill>
                   <a:srgbClr val="1E293B"/>
@@ -6171,7 +5975,7 @@
         <p:spPr>
           <a:xfrm>
             <a:off x="457200" y="6309360"/>
-            <a:ext cx="5486400" cy="365760"/>
+            <a:ext cx="10972800" cy="365760"/>
           </a:xfrm>
           <a:prstGeom prst="rect">
             <a:avLst/>
@@ -6192,42 +5996,7 @@
               </a:defRPr>
             </a:pPr>
             <a:r>
-              <a:t>IT工单系统 · 培训材料</a:t>
-            </a:r>
-          </a:p>
-        </p:txBody>
-      </p:sp>
-      <p:sp>
-        <p:nvSpPr>
-          <p:cNvPr id="5" name="TextBox 4"/>
-          <p:cNvSpPr txBox="1"/>
-          <p:nvPr/>
-        </p:nvSpPr>
-        <p:spPr>
-          <a:xfrm>
-            <a:off x="10058400" y="6309360"/>
-            <a:ext cx="1828800" cy="365760"/>
-          </a:xfrm>
-          <a:prstGeom prst="rect">
-            <a:avLst/>
-          </a:prstGeom>
-          <a:noFill/>
-        </p:spPr>
-        <p:txBody>
-          <a:bodyPr wrap="none">
-            <a:spAutoFit/>
-          </a:bodyPr>
-          <a:lstStyle/>
-          <a:p>
-            <a:pPr algn="r">
-              <a:defRPr sz="1100">
-                <a:solidFill>
-                  <a:srgbClr val="6B7280"/>
-                </a:solidFill>
-              </a:defRPr>
-            </a:pPr>
-            <a:r>
-              <a:t>4</a:t>
+              <a:t>IT工单系统 · 培训材料          4</a:t>
             </a:r>
           </a:p>
         </p:txBody>
@@ -6280,7 +6049,7 @@
           </a:bodyPr>
           <a:lstStyle/>
           <a:p>
-            <a:pPr algn="l">
+            <a:pPr>
               <a:defRPr sz="3200" b="1">
                 <a:solidFill>
                   <a:srgbClr val="1E293B"/>
@@ -6511,7 +6280,7 @@
         <p:spPr>
           <a:xfrm>
             <a:off x="457200" y="6309360"/>
-            <a:ext cx="5486400" cy="365760"/>
+            <a:ext cx="10972800" cy="365760"/>
           </a:xfrm>
           <a:prstGeom prst="rect">
             <a:avLst/>
@@ -6532,42 +6301,7 @@
               </a:defRPr>
             </a:pPr>
             <a:r>
-              <a:t>IT工单系统 · 培训材料</a:t>
-            </a:r>
-          </a:p>
-        </p:txBody>
-      </p:sp>
-      <p:sp>
-        <p:nvSpPr>
-          <p:cNvPr id="5" name="TextBox 4"/>
-          <p:cNvSpPr txBox="1"/>
-          <p:nvPr/>
-        </p:nvSpPr>
-        <p:spPr>
-          <a:xfrm>
-            <a:off x="10058400" y="6309360"/>
-            <a:ext cx="1828800" cy="365760"/>
-          </a:xfrm>
-          <a:prstGeom prst="rect">
-            <a:avLst/>
-          </a:prstGeom>
-          <a:noFill/>
-        </p:spPr>
-        <p:txBody>
-          <a:bodyPr wrap="none">
-            <a:spAutoFit/>
-          </a:bodyPr>
-          <a:lstStyle/>
-          <a:p>
-            <a:pPr algn="r">
-              <a:defRPr sz="1100">
-                <a:solidFill>
-                  <a:srgbClr val="6B7280"/>
-                </a:solidFill>
-              </a:defRPr>
-            </a:pPr>
-            <a:r>
-              <a:t>5</a:t>
+              <a:t>IT工单系统 · 培训材料          5</a:t>
             </a:r>
           </a:p>
         </p:txBody>
@@ -6620,7 +6354,7 @@
           </a:bodyPr>
           <a:lstStyle/>
           <a:p>
-            <a:pPr algn="l">
+            <a:pPr>
               <a:defRPr sz="3200" b="1">
                 <a:solidFill>
                   <a:srgbClr val="1E293B"/>
@@ -6851,7 +6585,7 @@
         <p:spPr>
           <a:xfrm>
             <a:off x="457200" y="6309360"/>
-            <a:ext cx="5486400" cy="365760"/>
+            <a:ext cx="10972800" cy="365760"/>
           </a:xfrm>
           <a:prstGeom prst="rect">
             <a:avLst/>
@@ -6872,42 +6606,7 @@
               </a:defRPr>
             </a:pPr>
             <a:r>
-              <a:t>IT工单系统 · 培训材料</a:t>
-            </a:r>
-          </a:p>
-        </p:txBody>
-      </p:sp>
-      <p:sp>
-        <p:nvSpPr>
-          <p:cNvPr id="5" name="TextBox 4"/>
-          <p:cNvSpPr txBox="1"/>
-          <p:nvPr/>
-        </p:nvSpPr>
-        <p:spPr>
-          <a:xfrm>
-            <a:off x="10058400" y="6309360"/>
-            <a:ext cx="1828800" cy="365760"/>
-          </a:xfrm>
-          <a:prstGeom prst="rect">
-            <a:avLst/>
-          </a:prstGeom>
-          <a:noFill/>
-        </p:spPr>
-        <p:txBody>
-          <a:bodyPr wrap="none">
-            <a:spAutoFit/>
-          </a:bodyPr>
-          <a:lstStyle/>
-          <a:p>
-            <a:pPr algn="r">
-              <a:defRPr sz="1100">
-                <a:solidFill>
-                  <a:srgbClr val="6B7280"/>
-                </a:solidFill>
-              </a:defRPr>
-            </a:pPr>
-            <a:r>
-              <a:t>6</a:t>
+              <a:t>IT工单系统 · 培训材料          6</a:t>
             </a:r>
           </a:p>
         </p:txBody>
@@ -6960,7 +6659,7 @@
           </a:bodyPr>
           <a:lstStyle/>
           <a:p>
-            <a:pPr algn="l">
+            <a:pPr>
               <a:defRPr sz="3200" b="1">
                 <a:solidFill>
                   <a:srgbClr val="1E293B"/>
@@ -7036,7 +6735,7 @@
               </a:defRPr>
             </a:pPr>
             <a:r>
-              <a:t>  • 全文搜索：支持按编号/标题/描述/创建人/指派人/状态/优先级/分类搜索</a:t>
+              <a:t>  • 全文搜索：支持按编号/标题/描述/创建人/指派人/状态搜索</a:t>
             </a:r>
           </a:p>
           <a:p>
@@ -7152,7 +6851,7 @@
         <p:spPr>
           <a:xfrm>
             <a:off x="457200" y="6309360"/>
-            <a:ext cx="5486400" cy="365760"/>
+            <a:ext cx="10972800" cy="365760"/>
           </a:xfrm>
           <a:prstGeom prst="rect">
             <a:avLst/>
@@ -7173,42 +6872,7 @@
               </a:defRPr>
             </a:pPr>
             <a:r>
-              <a:t>IT工单系统 · 培训材料</a:t>
-            </a:r>
-          </a:p>
-        </p:txBody>
-      </p:sp>
-      <p:sp>
-        <p:nvSpPr>
-          <p:cNvPr id="5" name="TextBox 4"/>
-          <p:cNvSpPr txBox="1"/>
-          <p:nvPr/>
-        </p:nvSpPr>
-        <p:spPr>
-          <a:xfrm>
-            <a:off x="10058400" y="6309360"/>
-            <a:ext cx="1828800" cy="365760"/>
-          </a:xfrm>
-          <a:prstGeom prst="rect">
-            <a:avLst/>
-          </a:prstGeom>
-          <a:noFill/>
-        </p:spPr>
-        <p:txBody>
-          <a:bodyPr wrap="none">
-            <a:spAutoFit/>
-          </a:bodyPr>
-          <a:lstStyle/>
-          <a:p>
-            <a:pPr algn="r">
-              <a:defRPr sz="1100">
-                <a:solidFill>
-                  <a:srgbClr val="6B7280"/>
-                </a:solidFill>
-              </a:defRPr>
-            </a:pPr>
-            <a:r>
-              <a:t>7</a:t>
+              <a:t>IT工单系统 · 培训材料          7</a:t>
             </a:r>
           </a:p>
         </p:txBody>
@@ -7261,7 +6925,7 @@
           </a:bodyPr>
           <a:lstStyle/>
           <a:p>
-            <a:pPr algn="l">
+            <a:pPr>
               <a:defRPr sz="3200" b="1">
                 <a:solidFill>
                   <a:srgbClr val="1E293B"/>
@@ -7378,6 +7042,21 @@
                 </a:solidFill>
               </a:defRPr>
             </a:pPr>
+            <a:r>
+              <a:t>  （升级已从排行榜移除，仅保留接收加分）</a:t>
+            </a:r>
+          </a:p>
+          <a:p>
+            <a:pPr>
+              <a:spcAft>
+                <a:spcPts val="600"/>
+              </a:spcAft>
+              <a:defRPr sz="1600">
+                <a:solidFill>
+                  <a:srgbClr val="1E293B"/>
+                </a:solidFill>
+              </a:defRPr>
+            </a:pPr>
           </a:p>
           <a:p>
             <a:pPr>
@@ -7447,7 +7126,7 @@
         <p:spPr>
           <a:xfrm>
             <a:off x="457200" y="6309360"/>
-            <a:ext cx="5486400" cy="365760"/>
+            <a:ext cx="10972800" cy="365760"/>
           </a:xfrm>
           <a:prstGeom prst="rect">
             <a:avLst/>
@@ -7468,42 +7147,7 @@
               </a:defRPr>
             </a:pPr>
             <a:r>
-              <a:t>IT工单系统 · 培训材料</a:t>
-            </a:r>
-          </a:p>
-        </p:txBody>
-      </p:sp>
-      <p:sp>
-        <p:nvSpPr>
-          <p:cNvPr id="5" name="TextBox 4"/>
-          <p:cNvSpPr txBox="1"/>
-          <p:nvPr/>
-        </p:nvSpPr>
-        <p:spPr>
-          <a:xfrm>
-            <a:off x="10058400" y="6309360"/>
-            <a:ext cx="1828800" cy="365760"/>
-          </a:xfrm>
-          <a:prstGeom prst="rect">
-            <a:avLst/>
-          </a:prstGeom>
-          <a:noFill/>
-        </p:spPr>
-        <p:txBody>
-          <a:bodyPr wrap="none">
-            <a:spAutoFit/>
-          </a:bodyPr>
-          <a:lstStyle/>
-          <a:p>
-            <a:pPr algn="r">
-              <a:defRPr sz="1100">
-                <a:solidFill>
-                  <a:srgbClr val="6B7280"/>
-                </a:solidFill>
-              </a:defRPr>
-            </a:pPr>
-            <a:r>
-              <a:t>8</a:t>
+              <a:t>IT工单系统 · 培训材料          8</a:t>
             </a:r>
           </a:p>
         </p:txBody>
@@ -7556,7 +7200,7 @@
           </a:bodyPr>
           <a:lstStyle/>
           <a:p>
-            <a:pPr algn="l">
+            <a:pPr>
               <a:defRPr sz="3200" b="1">
                 <a:solidFill>
                   <a:srgbClr val="1E293B"/>
@@ -7763,7 +7407,7 @@
         <p:spPr>
           <a:xfrm>
             <a:off x="457200" y="6309360"/>
-            <a:ext cx="5486400" cy="365760"/>
+            <a:ext cx="10972800" cy="365760"/>
           </a:xfrm>
           <a:prstGeom prst="rect">
             <a:avLst/>
@@ -7784,42 +7428,7 @@
               </a:defRPr>
             </a:pPr>
             <a:r>
-              <a:t>IT工单系统 · 培训材料</a:t>
-            </a:r>
-          </a:p>
-        </p:txBody>
-      </p:sp>
-      <p:sp>
-        <p:nvSpPr>
-          <p:cNvPr id="5" name="TextBox 4"/>
-          <p:cNvSpPr txBox="1"/>
-          <p:nvPr/>
-        </p:nvSpPr>
-        <p:spPr>
-          <a:xfrm>
-            <a:off x="10058400" y="6309360"/>
-            <a:ext cx="1828800" cy="365760"/>
-          </a:xfrm>
-          <a:prstGeom prst="rect">
-            <a:avLst/>
-          </a:prstGeom>
-          <a:noFill/>
-        </p:spPr>
-        <p:txBody>
-          <a:bodyPr wrap="none">
-            <a:spAutoFit/>
-          </a:bodyPr>
-          <a:lstStyle/>
-          <a:p>
-            <a:pPr algn="r">
-              <a:defRPr sz="1100">
-                <a:solidFill>
-                  <a:srgbClr val="6B7280"/>
-                </a:solidFill>
-              </a:defRPr>
-            </a:pPr>
-            <a:r>
-              <a:t>9</a:t>
+              <a:t>IT工单系统 · 培训材料          9</a:t>
             </a:r>
           </a:p>
         </p:txBody>

--- a/docs/IT工单系统-培训材料.pptx
+++ b/docs/IT工单系统-培训材料.pptx
@@ -20,6 +20,9 @@
     <p:sldId id="268" r:id="rId19"/>
     <p:sldId id="269" r:id="rId20"/>
     <p:sldId id="270" r:id="rId21"/>
+    <p:sldId id="271" r:id="rId22"/>
+    <p:sldId id="272" r:id="rId23"/>
+    <p:sldId id="273" r:id="rId24"/>
   </p:sldIdLst>
   <p:sldSz cx="12191695" cy="6858000" type="screen4x3"/>
   <p:notesSz cx="6858000" cy="9144000"/>
@@ -3233,41 +3236,6 @@
         </p:nvSpPr>
         <p:spPr>
           <a:xfrm>
-            <a:off x="457200" y="3840480"/>
-            <a:ext cx="10972800" cy="914400"/>
-          </a:xfrm>
-          <a:prstGeom prst="rect">
-            <a:avLst/>
-          </a:prstGeom>
-          <a:noFill/>
-        </p:spPr>
-        <p:txBody>
-          <a:bodyPr wrap="square">
-            <a:spAutoFit/>
-          </a:bodyPr>
-          <a:lstStyle/>
-          <a:p>
-            <a:pPr>
-              <a:spcAft>
-                <a:spcPts val="600"/>
-              </a:spcAft>
-              <a:defRPr sz="1600">
-                <a:solidFill>
-                  <a:srgbClr val="6B7280"/>
-                </a:solidFill>
-              </a:defRPr>
-            </a:pPr>
-          </a:p>
-        </p:txBody>
-      </p:sp>
-      <p:sp>
-        <p:nvSpPr>
-          <p:cNvPr id="5" name="TextBox 4"/>
-          <p:cNvSpPr txBox="1"/>
-          <p:nvPr/>
-        </p:nvSpPr>
-        <p:spPr>
-          <a:xfrm>
             <a:off x="457200" y="6309360"/>
             <a:ext cx="10972800" cy="365760"/>
           </a:xfrm>
@@ -3351,7 +3319,7 @@
               </a:defRPr>
             </a:pPr>
             <a:r>
-              <a:t>05  SLA 管理规则</a:t>
+              <a:t>04  工单列表与搜索</a:t>
             </a:r>
           </a:p>
         </p:txBody>
@@ -3389,280 +3357,139 @@
               </a:defRPr>
             </a:pPr>
             <a:r>
-              <a:t>SLA (Service Level Agreement) — 服务等级协议</a:t>
-            </a:r>
-          </a:p>
-          <a:p>
-            <a:pPr>
-              <a:spcAft>
-                <a:spcPts val="600"/>
-              </a:spcAft>
-              <a:defRPr sz="1600">
-                <a:solidFill>
-                  <a:srgbClr val="1E293B"/>
-                </a:solidFill>
-              </a:defRPr>
-            </a:pPr>
-          </a:p>
-          <a:p>
-            <a:pPr>
-              <a:spcAft>
-                <a:spcPts val="600"/>
-              </a:spcAft>
-              <a:defRPr sz="1600">
-                <a:solidFill>
-                  <a:srgbClr val="1E293B"/>
-                </a:solidFill>
-              </a:defRPr>
-            </a:pPr>
-            <a:r>
-              <a:t>优先级 × 响应时限：</a:t>
-            </a:r>
-          </a:p>
-          <a:p>
-            <a:pPr>
-              <a:spcAft>
-                <a:spcPts val="600"/>
-              </a:spcAft>
-              <a:defRPr sz="1600">
-                <a:solidFill>
-                  <a:srgbClr val="1E293B"/>
-                </a:solidFill>
-              </a:defRPr>
-            </a:pPr>
-            <a:r>
-              <a:t>  🔴 紧急  1 小时内</a:t>
-            </a:r>
-          </a:p>
-          <a:p>
-            <a:pPr>
-              <a:spcAft>
-                <a:spcPts val="600"/>
-              </a:spcAft>
-              <a:defRPr sz="1600">
-                <a:solidFill>
-                  <a:srgbClr val="1E293B"/>
-                </a:solidFill>
-              </a:defRPr>
-            </a:pPr>
-            <a:r>
-              <a:t>  🟠 高    2 小时内</a:t>
-            </a:r>
-          </a:p>
-          <a:p>
-            <a:pPr>
-              <a:spcAft>
-                <a:spcPts val="600"/>
-              </a:spcAft>
-              <a:defRPr sz="1600">
-                <a:solidFill>
-                  <a:srgbClr val="1E293B"/>
-                </a:solidFill>
-              </a:defRPr>
-            </a:pPr>
-            <a:r>
-              <a:t>  🟡 中    4 小时内</a:t>
-            </a:r>
-          </a:p>
-          <a:p>
-            <a:pPr>
-              <a:spcAft>
-                <a:spcPts val="600"/>
-              </a:spcAft>
-              <a:defRPr sz="1600">
-                <a:solidFill>
-                  <a:srgbClr val="1E293B"/>
-                </a:solidFill>
-              </a:defRPr>
-            </a:pPr>
-            <a:r>
-              <a:t>  🟢 低    8 小时内</a:t>
-            </a:r>
-          </a:p>
-          <a:p>
-            <a:pPr>
-              <a:spcAft>
-                <a:spcPts val="600"/>
-              </a:spcAft>
-              <a:defRPr sz="1600">
-                <a:solidFill>
-                  <a:srgbClr val="1E293B"/>
-                </a:solidFill>
-              </a:defRPr>
-            </a:pPr>
-          </a:p>
-          <a:p>
-            <a:pPr>
-              <a:spcAft>
-                <a:spcPts val="600"/>
-              </a:spcAft>
-              <a:defRPr sz="1600">
-                <a:solidFill>
-                  <a:srgbClr val="1E293B"/>
-                </a:solidFill>
-              </a:defRPr>
-            </a:pPr>
-            <a:r>
-              <a:t>业务时间规则：</a:t>
-            </a:r>
-          </a:p>
-          <a:p>
-            <a:pPr>
-              <a:spcAft>
-                <a:spcPts val="600"/>
-              </a:spcAft>
-              <a:defRPr sz="1600">
-                <a:solidFill>
-                  <a:srgbClr val="1E293B"/>
-                </a:solidFill>
-              </a:defRPr>
-            </a:pPr>
-            <a:r>
-              <a:t>  • 仅计算工作日（周一至周五）</a:t>
-            </a:r>
-          </a:p>
-          <a:p>
-            <a:pPr>
-              <a:spcAft>
-                <a:spcPts val="600"/>
-              </a:spcAft>
-              <a:defRPr sz="1600">
-                <a:solidFill>
-                  <a:srgbClr val="1E293B"/>
-                </a:solidFill>
-              </a:defRPr>
-            </a:pPr>
-            <a:r>
-              <a:t>  • 仅计算工作时间（08:00 – 17:00）</a:t>
-            </a:r>
-          </a:p>
-          <a:p>
-            <a:pPr>
-              <a:spcAft>
-                <a:spcPts val="600"/>
-              </a:spcAft>
-              <a:defRPr sz="1600">
-                <a:solidFill>
-                  <a:srgbClr val="1E293B"/>
-                </a:solidFill>
-              </a:defRPr>
-            </a:pPr>
-            <a:r>
-              <a:t>  • 非工作时间不累计 SLA 计时</a:t>
-            </a:r>
-          </a:p>
-          <a:p>
-            <a:pPr>
-              <a:spcAft>
-                <a:spcPts val="600"/>
-              </a:spcAft>
-              <a:defRPr sz="1600">
-                <a:solidFill>
-                  <a:srgbClr val="1E293B"/>
-                </a:solidFill>
-              </a:defRPr>
-            </a:pPr>
-          </a:p>
-          <a:p>
-            <a:pPr>
-              <a:spcAft>
-                <a:spcPts val="600"/>
-              </a:spcAft>
-              <a:defRPr sz="1600">
-                <a:solidFill>
-                  <a:srgbClr val="1E293B"/>
-                </a:solidFill>
-              </a:defRPr>
-            </a:pPr>
-            <a:r>
-              <a:t>过期计算示例：</a:t>
-            </a:r>
-          </a:p>
-          <a:p>
-            <a:pPr>
-              <a:spcAft>
-                <a:spcPts val="600"/>
-              </a:spcAft>
-              <a:defRPr sz="1600">
-                <a:solidFill>
-                  <a:srgbClr val="1E293B"/>
-                </a:solidFill>
-              </a:defRPr>
-            </a:pPr>
-            <a:r>
-              <a:t>  周五 16:00 提交（SLA 1小时，紧急）</a:t>
-            </a:r>
-          </a:p>
-          <a:p>
-            <a:pPr>
-              <a:spcAft>
-                <a:spcPts val="600"/>
-              </a:spcAft>
-              <a:defRPr sz="1600">
-                <a:solidFill>
-                  <a:srgbClr val="1E293B"/>
-                </a:solidFill>
-              </a:defRPr>
-            </a:pPr>
-            <a:r>
-              <a:t>  → 16:00-17:00 (1h) → SLA到期：当天 17:00</a:t>
-            </a:r>
-          </a:p>
-          <a:p>
-            <a:pPr>
-              <a:spcAft>
-                <a:spcPts val="600"/>
-              </a:spcAft>
-              <a:defRPr sz="1600">
-                <a:solidFill>
-                  <a:srgbClr val="1E293B"/>
-                </a:solidFill>
-              </a:defRPr>
-            </a:pPr>
-          </a:p>
-          <a:p>
-            <a:pPr>
-              <a:spcAft>
-                <a:spcPts val="600"/>
-              </a:spcAft>
-              <a:defRPr sz="1600">
-                <a:solidFill>
-                  <a:srgbClr val="1E293B"/>
-                </a:solidFill>
-              </a:defRPr>
-            </a:pPr>
-            <a:r>
-              <a:t>  周五 14:00 提交（SLA 4小时，中）</a:t>
-            </a:r>
-          </a:p>
-          <a:p>
-            <a:pPr>
-              <a:spcAft>
-                <a:spcPts val="600"/>
-              </a:spcAft>
-              <a:defRPr sz="1600">
-                <a:solidFill>
-                  <a:srgbClr val="1E293B"/>
-                </a:solidFill>
-              </a:defRPr>
-            </a:pPr>
-            <a:r>
-              <a:t>  → 14:00-17:00 (3h) → 下周一 08:00-09:00 (1h)</a:t>
-            </a:r>
-          </a:p>
-          <a:p>
-            <a:pPr>
-              <a:spcAft>
-                <a:spcPts val="600"/>
-              </a:spcAft>
-              <a:defRPr sz="1600">
-                <a:solidFill>
-                  <a:srgbClr val="1E293B"/>
-                </a:solidFill>
-              </a:defRPr>
-            </a:pPr>
-            <a:r>
-              <a:t>  → SLA到期：下周一 09:00</a:t>
+              <a:t>📋 工单列表 (/tickets)</a:t>
+            </a:r>
+          </a:p>
+          <a:p>
+            <a:pPr>
+              <a:spcAft>
+                <a:spcPts val="600"/>
+              </a:spcAft>
+              <a:defRPr sz="1600">
+                <a:solidFill>
+                  <a:srgbClr val="1E293B"/>
+                </a:solidFill>
+              </a:defRPr>
+            </a:pPr>
+            <a:r>
+              <a:t>  • 状态标签筛选：全部 | 待处理 | 处理中 | 已升级 | 已完成 | 已取消</a:t>
+            </a:r>
+          </a:p>
+          <a:p>
+            <a:pPr>
+              <a:spcAft>
+                <a:spcPts val="600"/>
+              </a:spcAft>
+              <a:defRPr sz="1600">
+                <a:solidFill>
+                  <a:srgbClr val="1E293B"/>
+                </a:solidFill>
+              </a:defRPr>
+            </a:pPr>
+            <a:r>
+              <a:t>  • 全文搜索：支持按编号/标题/描述/创建人/指派人/状态搜索</a:t>
+            </a:r>
+          </a:p>
+          <a:p>
+            <a:pPr>
+              <a:spcAft>
+                <a:spcPts val="600"/>
+              </a:spcAft>
+              <a:defRPr sz="1600">
+                <a:solidFill>
+                  <a:srgbClr val="1E293B"/>
+                </a:solidFill>
+              </a:defRPr>
+            </a:pPr>
+          </a:p>
+          <a:p>
+            <a:pPr>
+              <a:spcAft>
+                <a:spcPts val="600"/>
+              </a:spcAft>
+              <a:defRPr sz="1600">
+                <a:solidFill>
+                  <a:srgbClr val="1E293B"/>
+                </a:solidFill>
+              </a:defRPr>
+            </a:pPr>
+            <a:r>
+              <a:t>工单详情页 (/tickets/{id})</a:t>
+            </a:r>
+          </a:p>
+          <a:p>
+            <a:pPr>
+              <a:spcAft>
+                <a:spcPts val="600"/>
+              </a:spcAft>
+              <a:defRPr sz="1600">
+                <a:solidFill>
+                  <a:srgbClr val="1E293B"/>
+                </a:solidFill>
+              </a:defRPr>
+            </a:pPr>
+            <a:r>
+              <a:t>  • 修改状态（下拉选择）</a:t>
+            </a:r>
+          </a:p>
+          <a:p>
+            <a:pPr>
+              <a:spcAft>
+                <a:spcPts val="600"/>
+              </a:spcAft>
+              <a:defRPr sz="1600">
+                <a:solidFill>
+                  <a:srgbClr val="1E293B"/>
+                </a:solidFill>
+              </a:defRPr>
+            </a:pPr>
+            <a:r>
+              <a:t>  • 修改指派人</a:t>
+            </a:r>
+          </a:p>
+          <a:p>
+            <a:pPr>
+              <a:spcAft>
+                <a:spcPts val="600"/>
+              </a:spcAft>
+              <a:defRPr sz="1600">
+                <a:solidFill>
+                  <a:srgbClr val="1E293B"/>
+                </a:solidFill>
+              </a:defRPr>
+            </a:pPr>
+            <a:r>
+              <a:t>  • 添加备注（支持粘贴图片）</a:t>
+            </a:r>
+          </a:p>
+          <a:p>
+            <a:pPr>
+              <a:spcAft>
+                <a:spcPts val="600"/>
+              </a:spcAft>
+              <a:defRPr sz="1600">
+                <a:solidFill>
+                  <a:srgbClr val="1E293B"/>
+                </a:solidFill>
+              </a:defRPr>
+            </a:pPr>
+            <a:r>
+              <a:t>  • 上传附件（PDF / Word / Excel / 图片 / ZIP）</a:t>
+            </a:r>
+          </a:p>
+          <a:p>
+            <a:pPr>
+              <a:spcAft>
+                <a:spcPts val="600"/>
+              </a:spcAft>
+              <a:defRPr sz="1600">
+                <a:solidFill>
+                  <a:srgbClr val="1E293B"/>
+                </a:solidFill>
+              </a:defRPr>
+            </a:pPr>
+            <a:r>
+              <a:t>  • 查看完整工单历史记录</a:t>
             </a:r>
           </a:p>
         </p:txBody>
@@ -3758,7 +3585,7 @@
               </a:defRPr>
             </a:pPr>
             <a:r>
-              <a:t>06  管理员后台</a:t>
+              <a:t>05  仪表盘（上）</a:t>
             </a:r>
           </a:p>
         </p:txBody>
@@ -3796,151 +3623,148 @@
               </a:defRPr>
             </a:pPr>
             <a:r>
-              <a:t>管理员导航菜单：</a:t>
-            </a:r>
-          </a:p>
-          <a:p>
-            <a:pPr>
-              <a:spcAft>
-                <a:spcPts val="600"/>
-              </a:spcAft>
-              <a:defRPr sz="1600">
-                <a:solidFill>
-                  <a:srgbClr val="1E293B"/>
-                </a:solidFill>
-              </a:defRPr>
-            </a:pPr>
-          </a:p>
-          <a:p>
-            <a:pPr>
-              <a:spcAft>
-                <a:spcPts val="600"/>
-              </a:spcAft>
-              <a:defRPr sz="1600">
-                <a:solidFill>
-                  <a:srgbClr val="1E293B"/>
-                </a:solidFill>
-              </a:defRPr>
-            </a:pPr>
-            <a:r>
-              <a:t>  👥 用户管理      — 新增/编辑/启用/禁用用户</a:t>
-            </a:r>
-          </a:p>
-          <a:p>
-            <a:pPr>
-              <a:spcAft>
-                <a:spcPts val="600"/>
-              </a:spcAft>
-              <a:defRPr sz="1600">
-                <a:solidFill>
-                  <a:srgbClr val="1E293B"/>
-                </a:solidFill>
-              </a:defRPr>
-            </a:pPr>
-            <a:r>
-              <a:t>  🔐 权限控制表    — 配置工单状态流转规则</a:t>
-            </a:r>
-          </a:p>
-          <a:p>
-            <a:pPr>
-              <a:spcAft>
-                <a:spcPts val="600"/>
-              </a:spcAft>
-              <a:defRPr sz="1600">
-                <a:solidFill>
-                  <a:srgbClr val="1E293B"/>
-                </a:solidFill>
-              </a:defRPr>
-            </a:pPr>
-            <a:r>
-              <a:t>  📁 分类标准      — 管理工单分类及复杂度权重</a:t>
-            </a:r>
-          </a:p>
-          <a:p>
-            <a:pPr>
-              <a:spcAft>
-                <a:spcPts val="600"/>
-              </a:spcAft>
-              <a:defRPr sz="1600">
-                <a:solidFill>
-                  <a:srgbClr val="1E293B"/>
-                </a:solidFill>
-              </a:defRPr>
-            </a:pPr>
-            <a:r>
-              <a:t>  ⚡ SLA 标准      — 调整各优先级 SLA 时限，支持批量重算</a:t>
-            </a:r>
-          </a:p>
-          <a:p>
-            <a:pPr>
-              <a:spcAft>
-                <a:spcPts val="600"/>
-              </a:spcAft>
-              <a:defRPr sz="1600">
-                <a:solidFill>
-                  <a:srgbClr val="1E293B"/>
-                </a:solidFill>
-              </a:defRPr>
-            </a:pPr>
-            <a:r>
-              <a:t>  📅 工作日        — 配置工作日和上班时间</a:t>
-            </a:r>
-          </a:p>
-          <a:p>
-            <a:pPr>
-              <a:spcAft>
-                <a:spcPts val="600"/>
-              </a:spcAft>
-              <a:defRPr sz="1600">
-                <a:solidFill>
-                  <a:srgbClr val="1E293B"/>
-                </a:solidFill>
-              </a:defRPr>
-            </a:pPr>
-          </a:p>
-          <a:p>
-            <a:pPr>
-              <a:spcAft>
-                <a:spcPts val="600"/>
-              </a:spcAft>
-              <a:defRPr sz="1600">
-                <a:solidFill>
-                  <a:srgbClr val="1E293B"/>
-                </a:solidFill>
-              </a:defRPr>
-            </a:pPr>
-            <a:r>
-              <a:t>用户管理：</a:t>
-            </a:r>
-          </a:p>
-          <a:p>
-            <a:pPr>
-              <a:spcAft>
-                <a:spcPts val="600"/>
-              </a:spcAft>
-              <a:defRPr sz="1600">
-                <a:solidFill>
-                  <a:srgbClr val="1E293B"/>
-                </a:solidFill>
-              </a:defRPr>
-            </a:pPr>
-            <a:r>
-              <a:t>  • 角色：admin（管理员） / it_staff（IT人员）</a:t>
-            </a:r>
-          </a:p>
-          <a:p>
-            <a:pPr>
-              <a:spcAft>
-                <a:spcPts val="600"/>
-              </a:spcAft>
-              <a:defRPr sz="1600">
-                <a:solidFill>
-                  <a:srgbClr val="1E293B"/>
-                </a:solidFill>
-              </a:defRPr>
-            </a:pPr>
-            <a:r>
-              <a:t>  • 可启用/禁用账户，禁用后不参与排行榜统计</a:t>
+              <a:t>📊 摘要卡片 — 今日新建 / 处理中 / 已完成 / SLA达标率</a:t>
+            </a:r>
+          </a:p>
+          <a:p>
+            <a:pPr>
+              <a:spcAft>
+                <a:spcPts val="600"/>
+              </a:spcAft>
+              <a:defRPr sz="1600">
+                <a:solidFill>
+                  <a:srgbClr val="1E293B"/>
+                </a:solidFill>
+              </a:defRPr>
+            </a:pPr>
+          </a:p>
+          <a:p>
+            <a:pPr>
+              <a:spcAft>
+                <a:spcPts val="600"/>
+              </a:spcAft>
+              <a:defRPr sz="1600">
+                <a:solidFill>
+                  <a:srgbClr val="1E293B"/>
+                </a:solidFill>
+              </a:defRPr>
+            </a:pPr>
+            <a:r>
+              <a:t>🏆 摘牌排行榜 — IT 人员月度评分排名</a:t>
+            </a:r>
+          </a:p>
+          <a:p>
+            <a:pPr>
+              <a:spcAft>
+                <a:spcPts val="600"/>
+              </a:spcAft>
+              <a:defRPr sz="1600">
+                <a:solidFill>
+                  <a:srgbClr val="1E293B"/>
+                </a:solidFill>
+              </a:defRPr>
+            </a:pPr>
+            <a:r>
+              <a:t>评分公式（满分 100）：</a:t>
+            </a:r>
+          </a:p>
+          <a:p>
+            <a:pPr>
+              <a:spcAft>
+                <a:spcPts val="600"/>
+              </a:spcAft>
+              <a:defRPr sz="1600">
+                <a:solidFill>
+                  <a:srgbClr val="1E293B"/>
+                </a:solidFill>
+              </a:defRPr>
+            </a:pPr>
+            <a:r>
+              <a:t>  加权(35) + SLA(25) + 速度(20) + 响应(5) + 接收(+2/件最高10) + 退回(5−1/件最高5)</a:t>
+            </a:r>
+          </a:p>
+          <a:p>
+            <a:pPr>
+              <a:spcAft>
+                <a:spcPts val="600"/>
+              </a:spcAft>
+              <a:defRPr sz="1600">
+                <a:solidFill>
+                  <a:srgbClr val="1E293B"/>
+                </a:solidFill>
+              </a:defRPr>
+            </a:pPr>
+            <a:r>
+              <a:t>  （升级已从排行榜移除，仅保留接收加分）</a:t>
+            </a:r>
+          </a:p>
+          <a:p>
+            <a:pPr>
+              <a:spcAft>
+                <a:spcPts val="600"/>
+              </a:spcAft>
+              <a:defRPr sz="1600">
+                <a:solidFill>
+                  <a:srgbClr val="1E293B"/>
+                </a:solidFill>
+              </a:defRPr>
+            </a:pPr>
+          </a:p>
+          <a:p>
+            <a:pPr>
+              <a:spcAft>
+                <a:spcPts val="600"/>
+              </a:spcAft>
+              <a:defRPr sz="1600">
+                <a:solidFill>
+                  <a:srgbClr val="1E293B"/>
+                </a:solidFill>
+              </a:defRPr>
+            </a:pPr>
+            <a:r>
+              <a:t>🔥 热力图 — 个人每日工作强度日历视图</a:t>
+            </a:r>
+          </a:p>
+          <a:p>
+            <a:pPr>
+              <a:spcAft>
+                <a:spcPts val="600"/>
+              </a:spcAft>
+              <a:defRPr sz="1600">
+                <a:solidFill>
+                  <a:srgbClr val="1E293B"/>
+                </a:solidFill>
+              </a:defRPr>
+            </a:pPr>
+            <a:r>
+              <a:t>  颜色深浅表示当天完成工单数量</a:t>
+            </a:r>
+          </a:p>
+          <a:p>
+            <a:pPr>
+              <a:spcAft>
+                <a:spcPts val="600"/>
+              </a:spcAft>
+              <a:defRPr sz="1600">
+                <a:solidFill>
+                  <a:srgbClr val="1E293B"/>
+                </a:solidFill>
+              </a:defRPr>
+            </a:pPr>
+          </a:p>
+          <a:p>
+            <a:pPr>
+              <a:spcAft>
+                <a:spcPts val="600"/>
+              </a:spcAft>
+              <a:defRPr sz="1600">
+                <a:solidFill>
+                  <a:srgbClr val="1E293B"/>
+                </a:solidFill>
+              </a:defRPr>
+            </a:pPr>
+            <a:r>
+              <a:t>⚖️ 工作负载 — 每个 IT 人员当前待处理工单（按优先级堆叠）</a:t>
             </a:r>
           </a:p>
         </p:txBody>
@@ -4036,7 +3860,7 @@
               </a:defRPr>
             </a:pPr>
             <a:r>
-              <a:t>07  实操演练（一）</a:t>
+              <a:t>05  仪表盘（下）</a:t>
             </a:r>
           </a:p>
         </p:txBody>
@@ -4074,241 +3898,154 @@
               </a:defRPr>
             </a:pPr>
             <a:r>
-              <a:t>演练 1：提交工单</a:t>
-            </a:r>
-          </a:p>
-          <a:p>
-            <a:pPr>
-              <a:spcAft>
-                <a:spcPts val="600"/>
-              </a:spcAft>
-              <a:defRPr sz="1600">
-                <a:solidFill>
-                  <a:srgbClr val="1E293B"/>
-                </a:solidFill>
-              </a:defRPr>
-            </a:pPr>
-            <a:r>
-              <a:t>  ① 访问 http://服务器:8000/</a:t>
-            </a:r>
-          </a:p>
-          <a:p>
-            <a:pPr>
-              <a:spcAft>
-                <a:spcPts val="600"/>
-              </a:spcAft>
-              <a:defRPr sz="1600">
-                <a:solidFill>
-                  <a:srgbClr val="1E293B"/>
-                </a:solidFill>
-              </a:defRPr>
-            </a:pPr>
-            <a:r>
-              <a:t>  ② 点击「➕ 创建工单」</a:t>
-            </a:r>
-          </a:p>
-          <a:p>
-            <a:pPr>
-              <a:spcAft>
-                <a:spcPts val="600"/>
-              </a:spcAft>
-              <a:defRPr sz="1600">
-                <a:solidFill>
-                  <a:srgbClr val="1E293B"/>
-                </a:solidFill>
-              </a:defRPr>
-            </a:pPr>
-            <a:r>
-              <a:t>  ③ 填写标题、描述、选择分类和优先级</a:t>
-            </a:r>
-          </a:p>
-          <a:p>
-            <a:pPr>
-              <a:spcAft>
-                <a:spcPts val="600"/>
-              </a:spcAft>
-              <a:defRPr sz="1600">
-                <a:solidFill>
-                  <a:srgbClr val="1E293B"/>
-                </a:solidFill>
-              </a:defRPr>
-            </a:pPr>
-            <a:r>
-              <a:t>  ④ 点击「提交工单」</a:t>
-            </a:r>
-          </a:p>
-          <a:p>
-            <a:pPr>
-              <a:spcAft>
-                <a:spcPts val="600"/>
-              </a:spcAft>
-              <a:defRPr sz="1600">
-                <a:solidFill>
-                  <a:srgbClr val="1E293B"/>
-                </a:solidFill>
-              </a:defRPr>
-            </a:pPr>
-            <a:r>
-              <a:t>  ⑤ 记住工单编号</a:t>
-            </a:r>
-          </a:p>
-          <a:p>
-            <a:pPr>
-              <a:spcAft>
-                <a:spcPts val="600"/>
-              </a:spcAft>
-              <a:defRPr sz="1600">
-                <a:solidFill>
-                  <a:srgbClr val="1E293B"/>
-                </a:solidFill>
-              </a:defRPr>
-            </a:pPr>
-          </a:p>
-          <a:p>
-            <a:pPr>
-              <a:spcAft>
-                <a:spcPts val="600"/>
-              </a:spcAft>
-              <a:defRPr sz="1600">
-                <a:solidFill>
-                  <a:srgbClr val="1E293B"/>
-                </a:solidFill>
-              </a:defRPr>
-            </a:pPr>
-            <a:r>
-              <a:t>演练 2：处理工单（管理员操作）</a:t>
-            </a:r>
-          </a:p>
-          <a:p>
-            <a:pPr>
-              <a:spcAft>
-                <a:spcPts val="600"/>
-              </a:spcAft>
-              <a:defRPr sz="1600">
-                <a:solidFill>
-                  <a:srgbClr val="1E293B"/>
-                </a:solidFill>
-              </a:defRPr>
-            </a:pPr>
-            <a:r>
-              <a:t>  ① 进入工单详情页</a:t>
-            </a:r>
-          </a:p>
-          <a:p>
-            <a:pPr>
-              <a:spcAft>
-                <a:spcPts val="600"/>
-              </a:spcAft>
-              <a:defRPr sz="1600">
-                <a:solidFill>
-                  <a:srgbClr val="1E293B"/>
-                </a:solidFill>
-              </a:defRPr>
-            </a:pPr>
-            <a:r>
-              <a:t>  ② 将状态改为「处理中」</a:t>
-            </a:r>
-          </a:p>
-          <a:p>
-            <a:pPr>
-              <a:spcAft>
-                <a:spcPts val="600"/>
-              </a:spcAft>
-              <a:defRPr sz="1600">
-                <a:solidFill>
-                  <a:srgbClr val="1E293B"/>
-                </a:solidFill>
-              </a:defRPr>
-            </a:pPr>
-            <a:r>
-              <a:t>  ③ 指派给 IT 人员</a:t>
-            </a:r>
-          </a:p>
-          <a:p>
-            <a:pPr>
-              <a:spcAft>
-                <a:spcPts val="600"/>
-              </a:spcAft>
-              <a:defRPr sz="1600">
-                <a:solidFill>
-                  <a:srgbClr val="1E293B"/>
-                </a:solidFill>
-              </a:defRPr>
-            </a:pPr>
-            <a:r>
-              <a:t>  ④ 添加备注和附件</a:t>
-            </a:r>
-          </a:p>
-          <a:p>
-            <a:pPr>
-              <a:spcAft>
-                <a:spcPts val="600"/>
-              </a:spcAft>
-              <a:defRPr sz="1600">
-                <a:solidFill>
-                  <a:srgbClr val="1E293B"/>
-                </a:solidFill>
-              </a:defRPr>
-            </a:pPr>
-          </a:p>
-          <a:p>
-            <a:pPr>
-              <a:spcAft>
-                <a:spcPts val="600"/>
-              </a:spcAft>
-              <a:defRPr sz="1600">
-                <a:solidFill>
-                  <a:srgbClr val="1E293B"/>
-                </a:solidFill>
-              </a:defRPr>
-            </a:pPr>
-            <a:r>
-              <a:t>演练 3：完成工单（IT 人员操作）</a:t>
-            </a:r>
-          </a:p>
-          <a:p>
-            <a:pPr>
-              <a:spcAft>
-                <a:spcPts val="600"/>
-              </a:spcAft>
-              <a:defRPr sz="1600">
-                <a:solidFill>
-                  <a:srgbClr val="1E293B"/>
-                </a:solidFill>
-              </a:defRPr>
-            </a:pPr>
-            <a:r>
-              <a:t>  ① 打开分配给自己的工单</a:t>
-            </a:r>
-          </a:p>
-          <a:p>
-            <a:pPr>
-              <a:spcAft>
-                <a:spcPts val="600"/>
-              </a:spcAft>
-              <a:defRPr sz="1600">
-                <a:solidFill>
-                  <a:srgbClr val="1E293B"/>
-                </a:solidFill>
-              </a:defRPr>
-            </a:pPr>
-            <a:r>
-              <a:t>  ② 处理问题，添加处理备注</a:t>
-            </a:r>
-          </a:p>
-          <a:p>
-            <a:pPr>
-              <a:spcAft>
-                <a:spcPts val="600"/>
-              </a:spcAft>
-              <a:defRPr sz="1600">
-                <a:solidFill>
-                  <a:srgbClr val="1E293B"/>
-                </a:solidFill>
-              </a:defRPr>
-            </a:pPr>
-            <a:r>
-              <a:t>  ③ 将状态改为「已完成」</a:t>
+              <a:t>📈 图表面板：</a:t>
+            </a:r>
+          </a:p>
+          <a:p>
+            <a:pPr>
+              <a:spcAft>
+                <a:spcPts val="600"/>
+              </a:spcAft>
+              <a:defRPr sz="1600">
+                <a:solidFill>
+                  <a:srgbClr val="1E293B"/>
+                </a:solidFill>
+              </a:defRPr>
+            </a:pPr>
+          </a:p>
+          <a:p>
+            <a:pPr>
+              <a:spcAft>
+                <a:spcPts val="600"/>
+              </a:spcAft>
+              <a:defRPr sz="1600">
+                <a:solidFill>
+                  <a:srgbClr val="1E293B"/>
+                </a:solidFill>
+              </a:defRPr>
+            </a:pPr>
+            <a:r>
+              <a:t>  ⚡ 分类·平均时长    — 各分类工单平均处理耗时</a:t>
+            </a:r>
+          </a:p>
+          <a:p>
+            <a:pPr>
+              <a:spcAft>
+                <a:spcPts val="600"/>
+              </a:spcAft>
+              <a:defRPr sz="1600">
+                <a:solidFill>
+                  <a:srgbClr val="1E293B"/>
+                </a:solidFill>
+              </a:defRPr>
+            </a:pPr>
+            <a:r>
+              <a:t>  📊 分类·专长度      — 每个 IT 人员的分类擅长分布</a:t>
+            </a:r>
+          </a:p>
+          <a:p>
+            <a:pPr>
+              <a:spcAft>
+                <a:spcPts val="600"/>
+              </a:spcAft>
+              <a:defRPr sz="1600">
+                <a:solidFill>
+                  <a:srgbClr val="1E293B"/>
+                </a:solidFill>
+              </a:defRPr>
+            </a:pPr>
+            <a:r>
+              <a:t>  😊 满意度           — 用户评价统计（仅统计启用IT人员）</a:t>
+            </a:r>
+          </a:p>
+          <a:p>
+            <a:pPr>
+              <a:spcAft>
+                <a:spcPts val="600"/>
+              </a:spcAft>
+              <a:defRPr sz="1600">
+                <a:solidFill>
+                  <a:srgbClr val="1E293B"/>
+                </a:solidFill>
+              </a:defRPr>
+            </a:pPr>
+            <a:r>
+              <a:t>  🎯 工单状态分布     — 饼图（待处理/处理中/已完成/已取消）</a:t>
+            </a:r>
+          </a:p>
+          <a:p>
+            <a:pPr>
+              <a:spcAft>
+                <a:spcPts val="600"/>
+              </a:spcAft>
+              <a:defRPr sz="1600">
+                <a:solidFill>
+                  <a:srgbClr val="1E293B"/>
+                </a:solidFill>
+              </a:defRPr>
+            </a:pPr>
+            <a:r>
+              <a:t>  📊 优先级·平均时长  — 各优先级工单平均耗时对比</a:t>
+            </a:r>
+          </a:p>
+          <a:p>
+            <a:pPr>
+              <a:spcAft>
+                <a:spcPts val="600"/>
+              </a:spcAft>
+              <a:defRPr sz="1600">
+                <a:solidFill>
+                  <a:srgbClr val="1E293B"/>
+                </a:solidFill>
+              </a:defRPr>
+            </a:pPr>
+            <a:r>
+              <a:t>  ⏱️ 首次响应分布     — 首次响应时间区间统计</a:t>
+            </a:r>
+          </a:p>
+          <a:p>
+            <a:pPr>
+              <a:spcAft>
+                <a:spcPts val="600"/>
+              </a:spcAft>
+              <a:defRPr sz="1600">
+                <a:solidFill>
+                  <a:srgbClr val="1E293B"/>
+                </a:solidFill>
+              </a:defRPr>
+            </a:pPr>
+            <a:r>
+              <a:t>  📈 月度对比         — 新建/完成/SLA/时长/响应 月度环比</a:t>
+            </a:r>
+          </a:p>
+          <a:p>
+            <a:pPr>
+              <a:spcAft>
+                <a:spcPts val="600"/>
+              </a:spcAft>
+              <a:defRPr sz="1600">
+                <a:solidFill>
+                  <a:srgbClr val="1E293B"/>
+                </a:solidFill>
+              </a:defRPr>
+            </a:pPr>
+            <a:r>
+              <a:t>  📈 工单流量         — 创建 vs 解决趋势折线图</a:t>
+            </a:r>
+          </a:p>
+          <a:p>
+            <a:pPr>
+              <a:spcAft>
+                <a:spcPts val="600"/>
+              </a:spcAft>
+              <a:defRPr sz="1600">
+                <a:solidFill>
+                  <a:srgbClr val="1E293B"/>
+                </a:solidFill>
+              </a:defRPr>
+            </a:pPr>
+            <a:r>
+              <a:t>  📊 SLA趋势          — SLA达标率月度变化</a:t>
             </a:r>
           </a:p>
         </p:txBody>
@@ -4404,7 +4141,7 @@
               </a:defRPr>
             </a:pPr>
             <a:r>
-              <a:t>07  实操演练（二）</a:t>
+              <a:t>06  SLA 管理规则</a:t>
             </a:r>
           </a:p>
         </p:txBody>
@@ -4442,211 +4179,280 @@
               </a:defRPr>
             </a:pPr>
             <a:r>
-              <a:t>演练 4：查看仪表盘</a:t>
-            </a:r>
-          </a:p>
-          <a:p>
-            <a:pPr>
-              <a:spcAft>
-                <a:spcPts val="600"/>
-              </a:spcAft>
-              <a:defRPr sz="1600">
-                <a:solidFill>
-                  <a:srgbClr val="1E293B"/>
-                </a:solidFill>
-              </a:defRPr>
-            </a:pPr>
-            <a:r>
-              <a:t>  ① 点击「📊 仪表盘」</a:t>
-            </a:r>
-          </a:p>
-          <a:p>
-            <a:pPr>
-              <a:spcAft>
-                <a:spcPts val="600"/>
-              </a:spcAft>
-              <a:defRPr sz="1600">
-                <a:solidFill>
-                  <a:srgbClr val="1E293B"/>
-                </a:solidFill>
-              </a:defRPr>
-            </a:pPr>
-            <a:r>
-              <a:t>  ② 查看排行榜，理解评分计算</a:t>
-            </a:r>
-          </a:p>
-          <a:p>
-            <a:pPr>
-              <a:spcAft>
-                <a:spcPts val="600"/>
-              </a:spcAft>
-              <a:defRPr sz="1600">
-                <a:solidFill>
-                  <a:srgbClr val="1E293B"/>
-                </a:solidFill>
-              </a:defRPr>
-            </a:pPr>
-            <a:r>
-              <a:t>  ③ 查看热力图，确认个人工作量</a:t>
-            </a:r>
-          </a:p>
-          <a:p>
-            <a:pPr>
-              <a:spcAft>
-                <a:spcPts val="600"/>
-              </a:spcAft>
-              <a:defRPr sz="1600">
-                <a:solidFill>
-                  <a:srgbClr val="1E293B"/>
-                </a:solidFill>
-              </a:defRPr>
-            </a:pPr>
-            <a:r>
-              <a:t>  ④ 尝试切换月份，查看历史数据</a:t>
-            </a:r>
-          </a:p>
-          <a:p>
-            <a:pPr>
-              <a:spcAft>
-                <a:spcPts val="600"/>
-              </a:spcAft>
-              <a:defRPr sz="1600">
-                <a:solidFill>
-                  <a:srgbClr val="1E293B"/>
-                </a:solidFill>
-              </a:defRPr>
-            </a:pPr>
-          </a:p>
-          <a:p>
-            <a:pPr>
-              <a:spcAft>
-                <a:spcPts val="600"/>
-              </a:spcAft>
-              <a:defRPr sz="1600">
-                <a:solidFill>
-                  <a:srgbClr val="1E293B"/>
-                </a:solidFill>
-              </a:defRPr>
-            </a:pPr>
-            <a:r>
-              <a:t>演练 5：升级工单</a:t>
-            </a:r>
-          </a:p>
-          <a:p>
-            <a:pPr>
-              <a:spcAft>
-                <a:spcPts val="600"/>
-              </a:spcAft>
-              <a:defRPr sz="1600">
-                <a:solidFill>
-                  <a:srgbClr val="1E293B"/>
-                </a:solidFill>
-              </a:defRPr>
-            </a:pPr>
-            <a:r>
-              <a:t>  ① 处理中工单 → 状态改为「已升级」</a:t>
-            </a:r>
-          </a:p>
-          <a:p>
-            <a:pPr>
-              <a:spcAft>
-                <a:spcPts val="600"/>
-              </a:spcAft>
-              <a:defRPr sz="1600">
-                <a:solidFill>
-                  <a:srgbClr val="1E293B"/>
-                </a:solidFill>
-              </a:defRPr>
-            </a:pPr>
-            <a:r>
-              <a:t>  ② 管理员重新指派给其他 IT 人员</a:t>
-            </a:r>
-          </a:p>
-          <a:p>
-            <a:pPr>
-              <a:spcAft>
-                <a:spcPts val="600"/>
-              </a:spcAft>
-              <a:defRPr sz="1600">
-                <a:solidFill>
-                  <a:srgbClr val="1E293B"/>
-                </a:solidFill>
-              </a:defRPr>
-            </a:pPr>
-            <a:r>
-              <a:t>  ③ 接收人完成后，排行榜更新：接收人 +2分/件</a:t>
-            </a:r>
-          </a:p>
-          <a:p>
-            <a:pPr>
-              <a:spcAft>
-                <a:spcPts val="600"/>
-              </a:spcAft>
-              <a:defRPr sz="1600">
-                <a:solidFill>
-                  <a:srgbClr val="1E293B"/>
-                </a:solidFill>
-              </a:defRPr>
-            </a:pPr>
-          </a:p>
-          <a:p>
-            <a:pPr>
-              <a:spcAft>
-                <a:spcPts val="600"/>
-              </a:spcAft>
-              <a:defRPr sz="1600">
-                <a:solidFill>
-                  <a:srgbClr val="1E293B"/>
-                </a:solidFill>
-              </a:defRPr>
-            </a:pPr>
-            <a:r>
-              <a:t>演练 6：退回重做</a:t>
-            </a:r>
-          </a:p>
-          <a:p>
-            <a:pPr>
-              <a:spcAft>
-                <a:spcPts val="600"/>
-              </a:spcAft>
-              <a:defRPr sz="1600">
-                <a:solidFill>
-                  <a:srgbClr val="1E293B"/>
-                </a:solidFill>
-              </a:defRPr>
-            </a:pPr>
-            <a:r>
-              <a:t>  ① 已完成工单 → 状态改回「处理中」</a:t>
-            </a:r>
-          </a:p>
-          <a:p>
-            <a:pPr>
-              <a:spcAft>
-                <a:spcPts val="600"/>
-              </a:spcAft>
-              <a:defRPr sz="1600">
-                <a:solidFill>
-                  <a:srgbClr val="1E293B"/>
-                </a:solidFill>
-              </a:defRPr>
-            </a:pPr>
-            <a:r>
-              <a:t>  ② 重新处理后 → 状态改为「已完成」</a:t>
-            </a:r>
-          </a:p>
-          <a:p>
-            <a:pPr>
-              <a:spcAft>
-                <a:spcPts val="600"/>
-              </a:spcAft>
-              <a:defRPr sz="1600">
-                <a:solidFill>
-                  <a:srgbClr val="1E293B"/>
-                </a:solidFill>
-              </a:defRPr>
-            </a:pPr>
-            <a:r>
-              <a:t>  ③ 退回次数 +1 → 退回分 -1（最低0分）</a:t>
+              <a:t>SLA (Service Level Agreement) — 服务等级协议</a:t>
+            </a:r>
+          </a:p>
+          <a:p>
+            <a:pPr>
+              <a:spcAft>
+                <a:spcPts val="600"/>
+              </a:spcAft>
+              <a:defRPr sz="1600">
+                <a:solidFill>
+                  <a:srgbClr val="1E293B"/>
+                </a:solidFill>
+              </a:defRPr>
+            </a:pPr>
+          </a:p>
+          <a:p>
+            <a:pPr>
+              <a:spcAft>
+                <a:spcPts val="600"/>
+              </a:spcAft>
+              <a:defRPr sz="1600">
+                <a:solidFill>
+                  <a:srgbClr val="1E293B"/>
+                </a:solidFill>
+              </a:defRPr>
+            </a:pPr>
+            <a:r>
+              <a:t>优先级 × 响应时限：</a:t>
+            </a:r>
+          </a:p>
+          <a:p>
+            <a:pPr>
+              <a:spcAft>
+                <a:spcPts val="600"/>
+              </a:spcAft>
+              <a:defRPr sz="1600">
+                <a:solidFill>
+                  <a:srgbClr val="1E293B"/>
+                </a:solidFill>
+              </a:defRPr>
+            </a:pPr>
+            <a:r>
+              <a:t>  🔴 紧急  1 小时内</a:t>
+            </a:r>
+          </a:p>
+          <a:p>
+            <a:pPr>
+              <a:spcAft>
+                <a:spcPts val="600"/>
+              </a:spcAft>
+              <a:defRPr sz="1600">
+                <a:solidFill>
+                  <a:srgbClr val="1E293B"/>
+                </a:solidFill>
+              </a:defRPr>
+            </a:pPr>
+            <a:r>
+              <a:t>  🟠 高    2 小时内</a:t>
+            </a:r>
+          </a:p>
+          <a:p>
+            <a:pPr>
+              <a:spcAft>
+                <a:spcPts val="600"/>
+              </a:spcAft>
+              <a:defRPr sz="1600">
+                <a:solidFill>
+                  <a:srgbClr val="1E293B"/>
+                </a:solidFill>
+              </a:defRPr>
+            </a:pPr>
+            <a:r>
+              <a:t>  🟡 中    4 小时内</a:t>
+            </a:r>
+          </a:p>
+          <a:p>
+            <a:pPr>
+              <a:spcAft>
+                <a:spcPts val="600"/>
+              </a:spcAft>
+              <a:defRPr sz="1600">
+                <a:solidFill>
+                  <a:srgbClr val="1E293B"/>
+                </a:solidFill>
+              </a:defRPr>
+            </a:pPr>
+            <a:r>
+              <a:t>  🟢 低    8 小时内</a:t>
+            </a:r>
+          </a:p>
+          <a:p>
+            <a:pPr>
+              <a:spcAft>
+                <a:spcPts val="600"/>
+              </a:spcAft>
+              <a:defRPr sz="1600">
+                <a:solidFill>
+                  <a:srgbClr val="1E293B"/>
+                </a:solidFill>
+              </a:defRPr>
+            </a:pPr>
+          </a:p>
+          <a:p>
+            <a:pPr>
+              <a:spcAft>
+                <a:spcPts val="600"/>
+              </a:spcAft>
+              <a:defRPr sz="1600">
+                <a:solidFill>
+                  <a:srgbClr val="1E293B"/>
+                </a:solidFill>
+              </a:defRPr>
+            </a:pPr>
+            <a:r>
+              <a:t>业务时间规则：</a:t>
+            </a:r>
+          </a:p>
+          <a:p>
+            <a:pPr>
+              <a:spcAft>
+                <a:spcPts val="600"/>
+              </a:spcAft>
+              <a:defRPr sz="1600">
+                <a:solidFill>
+                  <a:srgbClr val="1E293B"/>
+                </a:solidFill>
+              </a:defRPr>
+            </a:pPr>
+            <a:r>
+              <a:t>  • 仅计算工作日（周一至周五）</a:t>
+            </a:r>
+          </a:p>
+          <a:p>
+            <a:pPr>
+              <a:spcAft>
+                <a:spcPts val="600"/>
+              </a:spcAft>
+              <a:defRPr sz="1600">
+                <a:solidFill>
+                  <a:srgbClr val="1E293B"/>
+                </a:solidFill>
+              </a:defRPr>
+            </a:pPr>
+            <a:r>
+              <a:t>  • 仅计算工作时间（08:00 – 17:00）</a:t>
+            </a:r>
+          </a:p>
+          <a:p>
+            <a:pPr>
+              <a:spcAft>
+                <a:spcPts val="600"/>
+              </a:spcAft>
+              <a:defRPr sz="1600">
+                <a:solidFill>
+                  <a:srgbClr val="1E293B"/>
+                </a:solidFill>
+              </a:defRPr>
+            </a:pPr>
+            <a:r>
+              <a:t>  • 非工作时间不累计 SLA 计时</a:t>
+            </a:r>
+          </a:p>
+          <a:p>
+            <a:pPr>
+              <a:spcAft>
+                <a:spcPts val="600"/>
+              </a:spcAft>
+              <a:defRPr sz="1600">
+                <a:solidFill>
+                  <a:srgbClr val="1E293B"/>
+                </a:solidFill>
+              </a:defRPr>
+            </a:pPr>
+          </a:p>
+          <a:p>
+            <a:pPr>
+              <a:spcAft>
+                <a:spcPts val="600"/>
+              </a:spcAft>
+              <a:defRPr sz="1600">
+                <a:solidFill>
+                  <a:srgbClr val="1E293B"/>
+                </a:solidFill>
+              </a:defRPr>
+            </a:pPr>
+            <a:r>
+              <a:t>过期计算示例：</a:t>
+            </a:r>
+          </a:p>
+          <a:p>
+            <a:pPr>
+              <a:spcAft>
+                <a:spcPts val="600"/>
+              </a:spcAft>
+              <a:defRPr sz="1600">
+                <a:solidFill>
+                  <a:srgbClr val="1E293B"/>
+                </a:solidFill>
+              </a:defRPr>
+            </a:pPr>
+            <a:r>
+              <a:t>  周五 16:00 提交（SLA 1小时，紧急）</a:t>
+            </a:r>
+          </a:p>
+          <a:p>
+            <a:pPr>
+              <a:spcAft>
+                <a:spcPts val="600"/>
+              </a:spcAft>
+              <a:defRPr sz="1600">
+                <a:solidFill>
+                  <a:srgbClr val="1E293B"/>
+                </a:solidFill>
+              </a:defRPr>
+            </a:pPr>
+            <a:r>
+              <a:t>  → 16:00-17:00 (1h) → SLA到期：当天 17:00</a:t>
+            </a:r>
+          </a:p>
+          <a:p>
+            <a:pPr>
+              <a:spcAft>
+                <a:spcPts val="600"/>
+              </a:spcAft>
+              <a:defRPr sz="1600">
+                <a:solidFill>
+                  <a:srgbClr val="1E293B"/>
+                </a:solidFill>
+              </a:defRPr>
+            </a:pPr>
+          </a:p>
+          <a:p>
+            <a:pPr>
+              <a:spcAft>
+                <a:spcPts val="600"/>
+              </a:spcAft>
+              <a:defRPr sz="1600">
+                <a:solidFill>
+                  <a:srgbClr val="1E293B"/>
+                </a:solidFill>
+              </a:defRPr>
+            </a:pPr>
+            <a:r>
+              <a:t>  周五 14:00 提交（SLA 4小时，中）</a:t>
+            </a:r>
+          </a:p>
+          <a:p>
+            <a:pPr>
+              <a:spcAft>
+                <a:spcPts val="600"/>
+              </a:spcAft>
+              <a:defRPr sz="1600">
+                <a:solidFill>
+                  <a:srgbClr val="1E293B"/>
+                </a:solidFill>
+              </a:defRPr>
+            </a:pPr>
+            <a:r>
+              <a:t>  → 14:00-17:00 (3h) → 下周一 08:00-09:00 (1h)</a:t>
+            </a:r>
+          </a:p>
+          <a:p>
+            <a:pPr>
+              <a:spcAft>
+                <a:spcPts val="600"/>
+              </a:spcAft>
+              <a:defRPr sz="1600">
+                <a:solidFill>
+                  <a:srgbClr val="1E293B"/>
+                </a:solidFill>
+              </a:defRPr>
+            </a:pPr>
+            <a:r>
+              <a:t>  → SLA到期：下周一 09:00</a:t>
             </a:r>
           </a:p>
         </p:txBody>
@@ -4742,7 +4548,7 @@
               </a:defRPr>
             </a:pPr>
             <a:r>
-              <a:t>08  常见问题与支持</a:t>
+              <a:t>07  管理员后台</a:t>
             </a:r>
           </a:p>
         </p:txBody>
@@ -4780,217 +4586,151 @@
               </a:defRPr>
             </a:pPr>
             <a:r>
-              <a:t>Q: 忘记密码怎么办？</a:t>
-            </a:r>
-          </a:p>
-          <a:p>
-            <a:pPr>
-              <a:spcAft>
-                <a:spcPts val="600"/>
-              </a:spcAft>
-              <a:defRPr sz="1600">
-                <a:solidFill>
-                  <a:srgbClr val="1E293B"/>
-                </a:solidFill>
-              </a:defRPr>
-            </a:pPr>
-            <a:r>
-              <a:t>A: 联系管理员重置密码，或使用「忘记密码」功能（需配置SMTP）</a:t>
-            </a:r>
-          </a:p>
-          <a:p>
-            <a:pPr>
-              <a:spcAft>
-                <a:spcPts val="600"/>
-              </a:spcAft>
-              <a:defRPr sz="1600">
-                <a:solidFill>
-                  <a:srgbClr val="1E293B"/>
-                </a:solidFill>
-              </a:defRPr>
-            </a:pPr>
-          </a:p>
-          <a:p>
-            <a:pPr>
-              <a:spcAft>
-                <a:spcPts val="600"/>
-              </a:spcAft>
-              <a:defRPr sz="1600">
-                <a:solidFill>
-                  <a:srgbClr val="1E293B"/>
-                </a:solidFill>
-              </a:defRPr>
-            </a:pPr>
-            <a:r>
-              <a:t>Q: 工单编号可以自定义吗？</a:t>
-            </a:r>
-          </a:p>
-          <a:p>
-            <a:pPr>
-              <a:spcAft>
-                <a:spcPts val="600"/>
-              </a:spcAft>
-              <a:defRPr sz="1600">
-                <a:solidFill>
-                  <a:srgbClr val="1E293B"/>
-                </a:solidFill>
-              </a:defRPr>
-            </a:pPr>
-            <a:r>
-              <a:t>A: 系统自动生成 IT-年份-序号 格式，不可手动修改</a:t>
-            </a:r>
-          </a:p>
-          <a:p>
-            <a:pPr>
-              <a:spcAft>
-                <a:spcPts val="600"/>
-              </a:spcAft>
-              <a:defRPr sz="1600">
-                <a:solidFill>
-                  <a:srgbClr val="1E293B"/>
-                </a:solidFill>
-              </a:defRPr>
-            </a:pPr>
-          </a:p>
-          <a:p>
-            <a:pPr>
-              <a:spcAft>
-                <a:spcPts val="600"/>
-              </a:spcAft>
-              <a:defRPr sz="1600">
-                <a:solidFill>
-                  <a:srgbClr val="1E293B"/>
-                </a:solidFill>
-              </a:defRPr>
-            </a:pPr>
-            <a:r>
-              <a:t>Q: SLA 已过期会怎样？</a:t>
-            </a:r>
-          </a:p>
-          <a:p>
-            <a:pPr>
-              <a:spcAft>
-                <a:spcPts val="600"/>
-              </a:spcAft>
-              <a:defRPr sz="1600">
-                <a:solidFill>
-                  <a:srgbClr val="1E293B"/>
-                </a:solidFill>
-              </a:defRPr>
-            </a:pPr>
-            <a:r>
-              <a:t>A: 工单状态正常不变，但在仪表盘 SLA 统计中记为未达标</a:t>
-            </a:r>
-          </a:p>
-          <a:p>
-            <a:pPr>
-              <a:spcAft>
-                <a:spcPts val="600"/>
-              </a:spcAft>
-              <a:defRPr sz="1600">
-                <a:solidFill>
-                  <a:srgbClr val="1E293B"/>
-                </a:solidFill>
-              </a:defRPr>
-            </a:pPr>
-          </a:p>
-          <a:p>
-            <a:pPr>
-              <a:spcAft>
-                <a:spcPts val="600"/>
-              </a:spcAft>
-              <a:defRPr sz="1600">
-                <a:solidFill>
-                  <a:srgbClr val="1E293B"/>
-                </a:solidFill>
-              </a:defRPr>
-            </a:pPr>
-            <a:r>
-              <a:t>Q: 支持手机访问吗？</a:t>
-            </a:r>
-          </a:p>
-          <a:p>
-            <a:pPr>
-              <a:spcAft>
-                <a:spcPts val="600"/>
-              </a:spcAft>
-              <a:defRPr sz="1600">
-                <a:solidFill>
-                  <a:srgbClr val="1E293B"/>
-                </a:solidFill>
-              </a:defRPr>
-            </a:pPr>
-            <a:r>
-              <a:t>A: 支持！系统采用响应式设计，适配手机/平板/桌面</a:t>
-            </a:r>
-          </a:p>
-          <a:p>
-            <a:pPr>
-              <a:spcAft>
-                <a:spcPts val="600"/>
-              </a:spcAft>
-              <a:defRPr sz="1600">
-                <a:solidFill>
-                  <a:srgbClr val="1E293B"/>
-                </a:solidFill>
-              </a:defRPr>
-            </a:pPr>
-          </a:p>
-          <a:p>
-            <a:pPr>
-              <a:spcAft>
-                <a:spcPts val="600"/>
-              </a:spcAft>
-              <a:defRPr sz="1600">
-                <a:solidFill>
-                  <a:srgbClr val="1E293B"/>
-                </a:solidFill>
-              </a:defRPr>
-            </a:pPr>
-            <a:r>
-              <a:t>Q: 数据如何备份？</a:t>
-            </a:r>
-          </a:p>
-          <a:p>
-            <a:pPr>
-              <a:spcAft>
-                <a:spcPts val="600"/>
-              </a:spcAft>
-              <a:defRPr sz="1600">
-                <a:solidFill>
-                  <a:srgbClr val="1E293B"/>
-                </a:solidFill>
-              </a:defRPr>
-            </a:pPr>
-            <a:r>
-              <a:t>A: 参考运维手册，使用 pg_dump 定期备份 PostgreSQL</a:t>
-            </a:r>
-          </a:p>
-          <a:p>
-            <a:pPr>
-              <a:spcAft>
-                <a:spcPts val="600"/>
-              </a:spcAft>
-              <a:defRPr sz="1600">
-                <a:solidFill>
-                  <a:srgbClr val="1E293B"/>
-                </a:solidFill>
-              </a:defRPr>
-            </a:pPr>
-          </a:p>
-          <a:p>
-            <a:pPr>
-              <a:spcAft>
-                <a:spcPts val="600"/>
-              </a:spcAft>
-              <a:defRPr sz="1600">
-                <a:solidFill>
-                  <a:srgbClr val="1E293B"/>
-                </a:solidFill>
-              </a:defRPr>
-            </a:pPr>
-            <a:r>
-              <a:t>📞 技术支持：参考项目交接清单</a:t>
+              <a:t>管理员导航菜单：</a:t>
+            </a:r>
+          </a:p>
+          <a:p>
+            <a:pPr>
+              <a:spcAft>
+                <a:spcPts val="600"/>
+              </a:spcAft>
+              <a:defRPr sz="1600">
+                <a:solidFill>
+                  <a:srgbClr val="1E293B"/>
+                </a:solidFill>
+              </a:defRPr>
+            </a:pPr>
+          </a:p>
+          <a:p>
+            <a:pPr>
+              <a:spcAft>
+                <a:spcPts val="600"/>
+              </a:spcAft>
+              <a:defRPr sz="1600">
+                <a:solidFill>
+                  <a:srgbClr val="1E293B"/>
+                </a:solidFill>
+              </a:defRPr>
+            </a:pPr>
+            <a:r>
+              <a:t>  👥 用户管理      — 新增/编辑/启用/禁用用户</a:t>
+            </a:r>
+          </a:p>
+          <a:p>
+            <a:pPr>
+              <a:spcAft>
+                <a:spcPts val="600"/>
+              </a:spcAft>
+              <a:defRPr sz="1600">
+                <a:solidFill>
+                  <a:srgbClr val="1E293B"/>
+                </a:solidFill>
+              </a:defRPr>
+            </a:pPr>
+            <a:r>
+              <a:t>  🔐 权限控制表    — 配置工单状态流转规则</a:t>
+            </a:r>
+          </a:p>
+          <a:p>
+            <a:pPr>
+              <a:spcAft>
+                <a:spcPts val="600"/>
+              </a:spcAft>
+              <a:defRPr sz="1600">
+                <a:solidFill>
+                  <a:srgbClr val="1E293B"/>
+                </a:solidFill>
+              </a:defRPr>
+            </a:pPr>
+            <a:r>
+              <a:t>  📁 分类标准      — 管理工单分类及复杂度权重</a:t>
+            </a:r>
+          </a:p>
+          <a:p>
+            <a:pPr>
+              <a:spcAft>
+                <a:spcPts val="600"/>
+              </a:spcAft>
+              <a:defRPr sz="1600">
+                <a:solidFill>
+                  <a:srgbClr val="1E293B"/>
+                </a:solidFill>
+              </a:defRPr>
+            </a:pPr>
+            <a:r>
+              <a:t>  ⚡ SLA 标准      — 调整各优先级 SLA 时限，支持批量重算</a:t>
+            </a:r>
+          </a:p>
+          <a:p>
+            <a:pPr>
+              <a:spcAft>
+                <a:spcPts val="600"/>
+              </a:spcAft>
+              <a:defRPr sz="1600">
+                <a:solidFill>
+                  <a:srgbClr val="1E293B"/>
+                </a:solidFill>
+              </a:defRPr>
+            </a:pPr>
+            <a:r>
+              <a:t>  📅 工作日        — 配置工作日和上班时间</a:t>
+            </a:r>
+          </a:p>
+          <a:p>
+            <a:pPr>
+              <a:spcAft>
+                <a:spcPts val="600"/>
+              </a:spcAft>
+              <a:defRPr sz="1600">
+                <a:solidFill>
+                  <a:srgbClr val="1E293B"/>
+                </a:solidFill>
+              </a:defRPr>
+            </a:pPr>
+          </a:p>
+          <a:p>
+            <a:pPr>
+              <a:spcAft>
+                <a:spcPts val="600"/>
+              </a:spcAft>
+              <a:defRPr sz="1600">
+                <a:solidFill>
+                  <a:srgbClr val="1E293B"/>
+                </a:solidFill>
+              </a:defRPr>
+            </a:pPr>
+            <a:r>
+              <a:t>用户管理：</a:t>
+            </a:r>
+          </a:p>
+          <a:p>
+            <a:pPr>
+              <a:spcAft>
+                <a:spcPts val="600"/>
+              </a:spcAft>
+              <a:defRPr sz="1600">
+                <a:solidFill>
+                  <a:srgbClr val="1E293B"/>
+                </a:solidFill>
+              </a:defRPr>
+            </a:pPr>
+            <a:r>
+              <a:t>  • 角色：admin（管理员） / it_staff（IT人员）</a:t>
+            </a:r>
+          </a:p>
+          <a:p>
+            <a:pPr>
+              <a:spcAft>
+                <a:spcPts val="600"/>
+              </a:spcAft>
+              <a:defRPr sz="1600">
+                <a:solidFill>
+                  <a:srgbClr val="1E293B"/>
+                </a:solidFill>
+              </a:defRPr>
+            </a:pPr>
+            <a:r>
+              <a:t>  • 可启用/禁用账户，禁用后不参与排行榜统计</a:t>
             </a:r>
           </a:p>
         </p:txBody>
@@ -5039,6 +4779,1056 @@
 </file>
 
 <file path=ppt/slides/slide15.xml><?xml version="1.0" encoding="utf-8"?>
+<p:sld xmlns:a="http://schemas.openxmlformats.org/drawingml/2006/main" xmlns:p="http://schemas.openxmlformats.org/presentationml/2006/main" xmlns:r="http://schemas.openxmlformats.org/officeDocument/2006/relationships">
+  <p:cSld>
+    <p:bg>
+      <p:bgPr>
+        <a:solidFill>
+          <a:srgbClr val="FFFFFF"/>
+        </a:solidFill>
+        <a:effectLst/>
+      </p:bgPr>
+    </p:bg>
+    <p:spTree>
+      <p:nvGrpSpPr>
+        <p:cNvPr id="1" name=""/>
+        <p:cNvGrpSpPr/>
+        <p:nvPr/>
+      </p:nvGrpSpPr>
+      <p:grpSpPr/>
+      <p:sp>
+        <p:nvSpPr>
+          <p:cNvPr id="2" name="TextBox 1"/>
+          <p:cNvSpPr txBox="1"/>
+          <p:nvPr/>
+        </p:nvSpPr>
+        <p:spPr>
+          <a:xfrm>
+            <a:off x="457200" y="548640"/>
+            <a:ext cx="10972800" cy="914400"/>
+          </a:xfrm>
+          <a:prstGeom prst="rect">
+            <a:avLst/>
+          </a:prstGeom>
+          <a:noFill/>
+        </p:spPr>
+        <p:txBody>
+          <a:bodyPr wrap="square">
+            <a:spAutoFit/>
+          </a:bodyPr>
+          <a:lstStyle/>
+          <a:p>
+            <a:pPr>
+              <a:defRPr sz="3200" b="1">
+                <a:solidFill>
+                  <a:srgbClr val="1E293B"/>
+                </a:solidFill>
+              </a:defRPr>
+            </a:pPr>
+            <a:r>
+              <a:t>08  实操演练（一）</a:t>
+            </a:r>
+          </a:p>
+        </p:txBody>
+      </p:sp>
+      <p:sp>
+        <p:nvSpPr>
+          <p:cNvPr id="3" name="TextBox 2"/>
+          <p:cNvSpPr txBox="1"/>
+          <p:nvPr/>
+        </p:nvSpPr>
+        <p:spPr>
+          <a:xfrm>
+            <a:off x="914400" y="1463040"/>
+            <a:ext cx="10058400" cy="4572000"/>
+          </a:xfrm>
+          <a:prstGeom prst="rect">
+            <a:avLst/>
+          </a:prstGeom>
+          <a:noFill/>
+        </p:spPr>
+        <p:txBody>
+          <a:bodyPr wrap="square">
+            <a:spAutoFit/>
+          </a:bodyPr>
+          <a:lstStyle/>
+          <a:p>
+            <a:pPr>
+              <a:spcAft>
+                <a:spcPts val="600"/>
+              </a:spcAft>
+              <a:defRPr sz="1600">
+                <a:solidFill>
+                  <a:srgbClr val="1E293B"/>
+                </a:solidFill>
+              </a:defRPr>
+            </a:pPr>
+            <a:r>
+              <a:t>演练 1：提交工单</a:t>
+            </a:r>
+          </a:p>
+          <a:p>
+            <a:pPr>
+              <a:spcAft>
+                <a:spcPts val="600"/>
+              </a:spcAft>
+              <a:defRPr sz="1600">
+                <a:solidFill>
+                  <a:srgbClr val="1E293B"/>
+                </a:solidFill>
+              </a:defRPr>
+            </a:pPr>
+            <a:r>
+              <a:t>  ① 访问 http://服务器:8000/</a:t>
+            </a:r>
+          </a:p>
+          <a:p>
+            <a:pPr>
+              <a:spcAft>
+                <a:spcPts val="600"/>
+              </a:spcAft>
+              <a:defRPr sz="1600">
+                <a:solidFill>
+                  <a:srgbClr val="1E293B"/>
+                </a:solidFill>
+              </a:defRPr>
+            </a:pPr>
+            <a:r>
+              <a:t>  ② 点击「➕ 创建工单」</a:t>
+            </a:r>
+          </a:p>
+          <a:p>
+            <a:pPr>
+              <a:spcAft>
+                <a:spcPts val="600"/>
+              </a:spcAft>
+              <a:defRPr sz="1600">
+                <a:solidFill>
+                  <a:srgbClr val="1E293B"/>
+                </a:solidFill>
+              </a:defRPr>
+            </a:pPr>
+            <a:r>
+              <a:t>  ③ 填写标题、描述、选择分类和优先级</a:t>
+            </a:r>
+          </a:p>
+          <a:p>
+            <a:pPr>
+              <a:spcAft>
+                <a:spcPts val="600"/>
+              </a:spcAft>
+              <a:defRPr sz="1600">
+                <a:solidFill>
+                  <a:srgbClr val="1E293B"/>
+                </a:solidFill>
+              </a:defRPr>
+            </a:pPr>
+            <a:r>
+              <a:t>  ④ 点击「提交工单」</a:t>
+            </a:r>
+          </a:p>
+          <a:p>
+            <a:pPr>
+              <a:spcAft>
+                <a:spcPts val="600"/>
+              </a:spcAft>
+              <a:defRPr sz="1600">
+                <a:solidFill>
+                  <a:srgbClr val="1E293B"/>
+                </a:solidFill>
+              </a:defRPr>
+            </a:pPr>
+            <a:r>
+              <a:t>  ⑤ 记住工单编号</a:t>
+            </a:r>
+          </a:p>
+          <a:p>
+            <a:pPr>
+              <a:spcAft>
+                <a:spcPts val="600"/>
+              </a:spcAft>
+              <a:defRPr sz="1600">
+                <a:solidFill>
+                  <a:srgbClr val="1E293B"/>
+                </a:solidFill>
+              </a:defRPr>
+            </a:pPr>
+          </a:p>
+          <a:p>
+            <a:pPr>
+              <a:spcAft>
+                <a:spcPts val="600"/>
+              </a:spcAft>
+              <a:defRPr sz="1600">
+                <a:solidFill>
+                  <a:srgbClr val="1E293B"/>
+                </a:solidFill>
+              </a:defRPr>
+            </a:pPr>
+            <a:r>
+              <a:t>演练 2：处理工单（管理员操作）</a:t>
+            </a:r>
+          </a:p>
+          <a:p>
+            <a:pPr>
+              <a:spcAft>
+                <a:spcPts val="600"/>
+              </a:spcAft>
+              <a:defRPr sz="1600">
+                <a:solidFill>
+                  <a:srgbClr val="1E293B"/>
+                </a:solidFill>
+              </a:defRPr>
+            </a:pPr>
+            <a:r>
+              <a:t>  ① 进入工单详情页</a:t>
+            </a:r>
+          </a:p>
+          <a:p>
+            <a:pPr>
+              <a:spcAft>
+                <a:spcPts val="600"/>
+              </a:spcAft>
+              <a:defRPr sz="1600">
+                <a:solidFill>
+                  <a:srgbClr val="1E293B"/>
+                </a:solidFill>
+              </a:defRPr>
+            </a:pPr>
+            <a:r>
+              <a:t>  ② 将状态改为「处理中」</a:t>
+            </a:r>
+          </a:p>
+          <a:p>
+            <a:pPr>
+              <a:spcAft>
+                <a:spcPts val="600"/>
+              </a:spcAft>
+              <a:defRPr sz="1600">
+                <a:solidFill>
+                  <a:srgbClr val="1E293B"/>
+                </a:solidFill>
+              </a:defRPr>
+            </a:pPr>
+            <a:r>
+              <a:t>  ③ 指派给 IT 人员</a:t>
+            </a:r>
+          </a:p>
+          <a:p>
+            <a:pPr>
+              <a:spcAft>
+                <a:spcPts val="600"/>
+              </a:spcAft>
+              <a:defRPr sz="1600">
+                <a:solidFill>
+                  <a:srgbClr val="1E293B"/>
+                </a:solidFill>
+              </a:defRPr>
+            </a:pPr>
+            <a:r>
+              <a:t>  ④ 添加备注和附件</a:t>
+            </a:r>
+          </a:p>
+          <a:p>
+            <a:pPr>
+              <a:spcAft>
+                <a:spcPts val="600"/>
+              </a:spcAft>
+              <a:defRPr sz="1600">
+                <a:solidFill>
+                  <a:srgbClr val="1E293B"/>
+                </a:solidFill>
+              </a:defRPr>
+            </a:pPr>
+          </a:p>
+          <a:p>
+            <a:pPr>
+              <a:spcAft>
+                <a:spcPts val="600"/>
+              </a:spcAft>
+              <a:defRPr sz="1600">
+                <a:solidFill>
+                  <a:srgbClr val="1E293B"/>
+                </a:solidFill>
+              </a:defRPr>
+            </a:pPr>
+            <a:r>
+              <a:t>演练 3：完成工单（IT 人员操作）</a:t>
+            </a:r>
+          </a:p>
+          <a:p>
+            <a:pPr>
+              <a:spcAft>
+                <a:spcPts val="600"/>
+              </a:spcAft>
+              <a:defRPr sz="1600">
+                <a:solidFill>
+                  <a:srgbClr val="1E293B"/>
+                </a:solidFill>
+              </a:defRPr>
+            </a:pPr>
+            <a:r>
+              <a:t>  ① 打开分配给自己的工单</a:t>
+            </a:r>
+          </a:p>
+          <a:p>
+            <a:pPr>
+              <a:spcAft>
+                <a:spcPts val="600"/>
+              </a:spcAft>
+              <a:defRPr sz="1600">
+                <a:solidFill>
+                  <a:srgbClr val="1E293B"/>
+                </a:solidFill>
+              </a:defRPr>
+            </a:pPr>
+            <a:r>
+              <a:t>  ② 处理问题，添加处理备注</a:t>
+            </a:r>
+          </a:p>
+          <a:p>
+            <a:pPr>
+              <a:spcAft>
+                <a:spcPts val="600"/>
+              </a:spcAft>
+              <a:defRPr sz="1600">
+                <a:solidFill>
+                  <a:srgbClr val="1E293B"/>
+                </a:solidFill>
+              </a:defRPr>
+            </a:pPr>
+            <a:r>
+              <a:t>  ③ 将状态改为「已完成」</a:t>
+            </a:r>
+          </a:p>
+        </p:txBody>
+      </p:sp>
+      <p:sp>
+        <p:nvSpPr>
+          <p:cNvPr id="4" name="TextBox 3"/>
+          <p:cNvSpPr txBox="1"/>
+          <p:nvPr/>
+        </p:nvSpPr>
+        <p:spPr>
+          <a:xfrm>
+            <a:off x="457200" y="6309360"/>
+            <a:ext cx="10972800" cy="365760"/>
+          </a:xfrm>
+          <a:prstGeom prst="rect">
+            <a:avLst/>
+          </a:prstGeom>
+          <a:noFill/>
+        </p:spPr>
+        <p:txBody>
+          <a:bodyPr wrap="none">
+            <a:spAutoFit/>
+          </a:bodyPr>
+          <a:lstStyle/>
+          <a:p>
+            <a:pPr>
+              <a:defRPr sz="1100">
+                <a:solidFill>
+                  <a:srgbClr val="6B7280"/>
+                </a:solidFill>
+              </a:defRPr>
+            </a:pPr>
+            <a:r>
+              <a:t>IT工单系统 · 培训材料          15</a:t>
+            </a:r>
+          </a:p>
+        </p:txBody>
+      </p:sp>
+    </p:spTree>
+  </p:cSld>
+  <p:clrMapOvr>
+    <a:masterClrMapping/>
+  </p:clrMapOvr>
+</p:sld>
+</file>
+
+<file path=ppt/slides/slide16.xml><?xml version="1.0" encoding="utf-8"?>
+<p:sld xmlns:a="http://schemas.openxmlformats.org/drawingml/2006/main" xmlns:p="http://schemas.openxmlformats.org/presentationml/2006/main" xmlns:r="http://schemas.openxmlformats.org/officeDocument/2006/relationships">
+  <p:cSld>
+    <p:bg>
+      <p:bgPr>
+        <a:solidFill>
+          <a:srgbClr val="FFFFFF"/>
+        </a:solidFill>
+        <a:effectLst/>
+      </p:bgPr>
+    </p:bg>
+    <p:spTree>
+      <p:nvGrpSpPr>
+        <p:cNvPr id="1" name=""/>
+        <p:cNvGrpSpPr/>
+        <p:nvPr/>
+      </p:nvGrpSpPr>
+      <p:grpSpPr/>
+      <p:sp>
+        <p:nvSpPr>
+          <p:cNvPr id="2" name="TextBox 1"/>
+          <p:cNvSpPr txBox="1"/>
+          <p:nvPr/>
+        </p:nvSpPr>
+        <p:spPr>
+          <a:xfrm>
+            <a:off x="457200" y="548640"/>
+            <a:ext cx="10972800" cy="914400"/>
+          </a:xfrm>
+          <a:prstGeom prst="rect">
+            <a:avLst/>
+          </a:prstGeom>
+          <a:noFill/>
+        </p:spPr>
+        <p:txBody>
+          <a:bodyPr wrap="square">
+            <a:spAutoFit/>
+          </a:bodyPr>
+          <a:lstStyle/>
+          <a:p>
+            <a:pPr>
+              <a:defRPr sz="3200" b="1">
+                <a:solidFill>
+                  <a:srgbClr val="1E293B"/>
+                </a:solidFill>
+              </a:defRPr>
+            </a:pPr>
+            <a:r>
+              <a:t>08  实操演练（二）</a:t>
+            </a:r>
+          </a:p>
+        </p:txBody>
+      </p:sp>
+      <p:sp>
+        <p:nvSpPr>
+          <p:cNvPr id="3" name="TextBox 2"/>
+          <p:cNvSpPr txBox="1"/>
+          <p:nvPr/>
+        </p:nvSpPr>
+        <p:spPr>
+          <a:xfrm>
+            <a:off x="914400" y="1463040"/>
+            <a:ext cx="10058400" cy="4572000"/>
+          </a:xfrm>
+          <a:prstGeom prst="rect">
+            <a:avLst/>
+          </a:prstGeom>
+          <a:noFill/>
+        </p:spPr>
+        <p:txBody>
+          <a:bodyPr wrap="square">
+            <a:spAutoFit/>
+          </a:bodyPr>
+          <a:lstStyle/>
+          <a:p>
+            <a:pPr>
+              <a:spcAft>
+                <a:spcPts val="600"/>
+              </a:spcAft>
+              <a:defRPr sz="1600">
+                <a:solidFill>
+                  <a:srgbClr val="1E293B"/>
+                </a:solidFill>
+              </a:defRPr>
+            </a:pPr>
+            <a:r>
+              <a:t>演练 4：查看仪表盘</a:t>
+            </a:r>
+          </a:p>
+          <a:p>
+            <a:pPr>
+              <a:spcAft>
+                <a:spcPts val="600"/>
+              </a:spcAft>
+              <a:defRPr sz="1600">
+                <a:solidFill>
+                  <a:srgbClr val="1E293B"/>
+                </a:solidFill>
+              </a:defRPr>
+            </a:pPr>
+            <a:r>
+              <a:t>  ① 点击「📊 仪表盘」</a:t>
+            </a:r>
+          </a:p>
+          <a:p>
+            <a:pPr>
+              <a:spcAft>
+                <a:spcPts val="600"/>
+              </a:spcAft>
+              <a:defRPr sz="1600">
+                <a:solidFill>
+                  <a:srgbClr val="1E293B"/>
+                </a:solidFill>
+              </a:defRPr>
+            </a:pPr>
+            <a:r>
+              <a:t>  ② 查看排行榜，理解评分计算</a:t>
+            </a:r>
+          </a:p>
+          <a:p>
+            <a:pPr>
+              <a:spcAft>
+                <a:spcPts val="600"/>
+              </a:spcAft>
+              <a:defRPr sz="1600">
+                <a:solidFill>
+                  <a:srgbClr val="1E293B"/>
+                </a:solidFill>
+              </a:defRPr>
+            </a:pPr>
+            <a:r>
+              <a:t>  ③ 查看热力图，确认个人工作量</a:t>
+            </a:r>
+          </a:p>
+          <a:p>
+            <a:pPr>
+              <a:spcAft>
+                <a:spcPts val="600"/>
+              </a:spcAft>
+              <a:defRPr sz="1600">
+                <a:solidFill>
+                  <a:srgbClr val="1E293B"/>
+                </a:solidFill>
+              </a:defRPr>
+            </a:pPr>
+            <a:r>
+              <a:t>  ④ 尝试切换月份，查看历史数据</a:t>
+            </a:r>
+          </a:p>
+          <a:p>
+            <a:pPr>
+              <a:spcAft>
+                <a:spcPts val="600"/>
+              </a:spcAft>
+              <a:defRPr sz="1600">
+                <a:solidFill>
+                  <a:srgbClr val="1E293B"/>
+                </a:solidFill>
+              </a:defRPr>
+            </a:pPr>
+          </a:p>
+          <a:p>
+            <a:pPr>
+              <a:spcAft>
+                <a:spcPts val="600"/>
+              </a:spcAft>
+              <a:defRPr sz="1600">
+                <a:solidFill>
+                  <a:srgbClr val="1E293B"/>
+                </a:solidFill>
+              </a:defRPr>
+            </a:pPr>
+            <a:r>
+              <a:t>演练 5：升级工单</a:t>
+            </a:r>
+          </a:p>
+          <a:p>
+            <a:pPr>
+              <a:spcAft>
+                <a:spcPts val="600"/>
+              </a:spcAft>
+              <a:defRPr sz="1600">
+                <a:solidFill>
+                  <a:srgbClr val="1E293B"/>
+                </a:solidFill>
+              </a:defRPr>
+            </a:pPr>
+            <a:r>
+              <a:t>  ① 处理中工单 → 状态改为「已升级」</a:t>
+            </a:r>
+          </a:p>
+          <a:p>
+            <a:pPr>
+              <a:spcAft>
+                <a:spcPts val="600"/>
+              </a:spcAft>
+              <a:defRPr sz="1600">
+                <a:solidFill>
+                  <a:srgbClr val="1E293B"/>
+                </a:solidFill>
+              </a:defRPr>
+            </a:pPr>
+            <a:r>
+              <a:t>  ② 管理员重新指派给其他 IT 人员</a:t>
+            </a:r>
+          </a:p>
+          <a:p>
+            <a:pPr>
+              <a:spcAft>
+                <a:spcPts val="600"/>
+              </a:spcAft>
+              <a:defRPr sz="1600">
+                <a:solidFill>
+                  <a:srgbClr val="1E293B"/>
+                </a:solidFill>
+              </a:defRPr>
+            </a:pPr>
+            <a:r>
+              <a:t>  ③ 接收人完成后，排行榜更新：接收人 +2分/件</a:t>
+            </a:r>
+          </a:p>
+          <a:p>
+            <a:pPr>
+              <a:spcAft>
+                <a:spcPts val="600"/>
+              </a:spcAft>
+              <a:defRPr sz="1600">
+                <a:solidFill>
+                  <a:srgbClr val="1E293B"/>
+                </a:solidFill>
+              </a:defRPr>
+            </a:pPr>
+          </a:p>
+          <a:p>
+            <a:pPr>
+              <a:spcAft>
+                <a:spcPts val="600"/>
+              </a:spcAft>
+              <a:defRPr sz="1600">
+                <a:solidFill>
+                  <a:srgbClr val="1E293B"/>
+                </a:solidFill>
+              </a:defRPr>
+            </a:pPr>
+            <a:r>
+              <a:t>演练 6：退回重做</a:t>
+            </a:r>
+          </a:p>
+          <a:p>
+            <a:pPr>
+              <a:spcAft>
+                <a:spcPts val="600"/>
+              </a:spcAft>
+              <a:defRPr sz="1600">
+                <a:solidFill>
+                  <a:srgbClr val="1E293B"/>
+                </a:solidFill>
+              </a:defRPr>
+            </a:pPr>
+            <a:r>
+              <a:t>  ① 已完成工单 → 状态改回「处理中」</a:t>
+            </a:r>
+          </a:p>
+          <a:p>
+            <a:pPr>
+              <a:spcAft>
+                <a:spcPts val="600"/>
+              </a:spcAft>
+              <a:defRPr sz="1600">
+                <a:solidFill>
+                  <a:srgbClr val="1E293B"/>
+                </a:solidFill>
+              </a:defRPr>
+            </a:pPr>
+            <a:r>
+              <a:t>  ② 重新处理后 → 状态改为「已完成」</a:t>
+            </a:r>
+          </a:p>
+          <a:p>
+            <a:pPr>
+              <a:spcAft>
+                <a:spcPts val="600"/>
+              </a:spcAft>
+              <a:defRPr sz="1600">
+                <a:solidFill>
+                  <a:srgbClr val="1E293B"/>
+                </a:solidFill>
+              </a:defRPr>
+            </a:pPr>
+            <a:r>
+              <a:t>  ③ 退回次数 +1 → 退回分 -1（最低0分）</a:t>
+            </a:r>
+          </a:p>
+        </p:txBody>
+      </p:sp>
+      <p:sp>
+        <p:nvSpPr>
+          <p:cNvPr id="4" name="TextBox 3"/>
+          <p:cNvSpPr txBox="1"/>
+          <p:nvPr/>
+        </p:nvSpPr>
+        <p:spPr>
+          <a:xfrm>
+            <a:off x="457200" y="6309360"/>
+            <a:ext cx="10972800" cy="365760"/>
+          </a:xfrm>
+          <a:prstGeom prst="rect">
+            <a:avLst/>
+          </a:prstGeom>
+          <a:noFill/>
+        </p:spPr>
+        <p:txBody>
+          <a:bodyPr wrap="none">
+            <a:spAutoFit/>
+          </a:bodyPr>
+          <a:lstStyle/>
+          <a:p>
+            <a:pPr>
+              <a:defRPr sz="1100">
+                <a:solidFill>
+                  <a:srgbClr val="6B7280"/>
+                </a:solidFill>
+              </a:defRPr>
+            </a:pPr>
+            <a:r>
+              <a:t>IT工单系统 · 培训材料          16</a:t>
+            </a:r>
+          </a:p>
+        </p:txBody>
+      </p:sp>
+    </p:spTree>
+  </p:cSld>
+  <p:clrMapOvr>
+    <a:masterClrMapping/>
+  </p:clrMapOvr>
+</p:sld>
+</file>
+
+<file path=ppt/slides/slide17.xml><?xml version="1.0" encoding="utf-8"?>
+<p:sld xmlns:a="http://schemas.openxmlformats.org/drawingml/2006/main" xmlns:p="http://schemas.openxmlformats.org/presentationml/2006/main" xmlns:r="http://schemas.openxmlformats.org/officeDocument/2006/relationships">
+  <p:cSld>
+    <p:bg>
+      <p:bgPr>
+        <a:solidFill>
+          <a:srgbClr val="FFFFFF"/>
+        </a:solidFill>
+        <a:effectLst/>
+      </p:bgPr>
+    </p:bg>
+    <p:spTree>
+      <p:nvGrpSpPr>
+        <p:cNvPr id="1" name=""/>
+        <p:cNvGrpSpPr/>
+        <p:nvPr/>
+      </p:nvGrpSpPr>
+      <p:grpSpPr/>
+      <p:sp>
+        <p:nvSpPr>
+          <p:cNvPr id="2" name="TextBox 1"/>
+          <p:cNvSpPr txBox="1"/>
+          <p:nvPr/>
+        </p:nvSpPr>
+        <p:spPr>
+          <a:xfrm>
+            <a:off x="457200" y="548640"/>
+            <a:ext cx="10972800" cy="914400"/>
+          </a:xfrm>
+          <a:prstGeom prst="rect">
+            <a:avLst/>
+          </a:prstGeom>
+          <a:noFill/>
+        </p:spPr>
+        <p:txBody>
+          <a:bodyPr wrap="square">
+            <a:spAutoFit/>
+          </a:bodyPr>
+          <a:lstStyle/>
+          <a:p>
+            <a:pPr>
+              <a:defRPr sz="3200" b="1">
+                <a:solidFill>
+                  <a:srgbClr val="1E293B"/>
+                </a:solidFill>
+              </a:defRPr>
+            </a:pPr>
+            <a:r>
+              <a:t>09  常见问题与支持</a:t>
+            </a:r>
+          </a:p>
+        </p:txBody>
+      </p:sp>
+      <p:sp>
+        <p:nvSpPr>
+          <p:cNvPr id="3" name="TextBox 2"/>
+          <p:cNvSpPr txBox="1"/>
+          <p:nvPr/>
+        </p:nvSpPr>
+        <p:spPr>
+          <a:xfrm>
+            <a:off x="914400" y="1463040"/>
+            <a:ext cx="10058400" cy="4572000"/>
+          </a:xfrm>
+          <a:prstGeom prst="rect">
+            <a:avLst/>
+          </a:prstGeom>
+          <a:noFill/>
+        </p:spPr>
+        <p:txBody>
+          <a:bodyPr wrap="square">
+            <a:spAutoFit/>
+          </a:bodyPr>
+          <a:lstStyle/>
+          <a:p>
+            <a:pPr>
+              <a:spcAft>
+                <a:spcPts val="600"/>
+              </a:spcAft>
+              <a:defRPr sz="1600">
+                <a:solidFill>
+                  <a:srgbClr val="1E293B"/>
+                </a:solidFill>
+              </a:defRPr>
+            </a:pPr>
+            <a:r>
+              <a:t>Q: 忘记密码怎么办？</a:t>
+            </a:r>
+          </a:p>
+          <a:p>
+            <a:pPr>
+              <a:spcAft>
+                <a:spcPts val="600"/>
+              </a:spcAft>
+              <a:defRPr sz="1600">
+                <a:solidFill>
+                  <a:srgbClr val="1E293B"/>
+                </a:solidFill>
+              </a:defRPr>
+            </a:pPr>
+            <a:r>
+              <a:t>A: 联系管理员重置密码，或使用「忘记密码」功能（需配置SMTP）</a:t>
+            </a:r>
+          </a:p>
+          <a:p>
+            <a:pPr>
+              <a:spcAft>
+                <a:spcPts val="600"/>
+              </a:spcAft>
+              <a:defRPr sz="1600">
+                <a:solidFill>
+                  <a:srgbClr val="1E293B"/>
+                </a:solidFill>
+              </a:defRPr>
+            </a:pPr>
+          </a:p>
+          <a:p>
+            <a:pPr>
+              <a:spcAft>
+                <a:spcPts val="600"/>
+              </a:spcAft>
+              <a:defRPr sz="1600">
+                <a:solidFill>
+                  <a:srgbClr val="1E293B"/>
+                </a:solidFill>
+              </a:defRPr>
+            </a:pPr>
+            <a:r>
+              <a:t>Q: 工单编号可以自定义吗？</a:t>
+            </a:r>
+          </a:p>
+          <a:p>
+            <a:pPr>
+              <a:spcAft>
+                <a:spcPts val="600"/>
+              </a:spcAft>
+              <a:defRPr sz="1600">
+                <a:solidFill>
+                  <a:srgbClr val="1E293B"/>
+                </a:solidFill>
+              </a:defRPr>
+            </a:pPr>
+            <a:r>
+              <a:t>A: 系统自动生成 IT-年份-序号 格式，不可手动修改</a:t>
+            </a:r>
+          </a:p>
+          <a:p>
+            <a:pPr>
+              <a:spcAft>
+                <a:spcPts val="600"/>
+              </a:spcAft>
+              <a:defRPr sz="1600">
+                <a:solidFill>
+                  <a:srgbClr val="1E293B"/>
+                </a:solidFill>
+              </a:defRPr>
+            </a:pPr>
+          </a:p>
+          <a:p>
+            <a:pPr>
+              <a:spcAft>
+                <a:spcPts val="600"/>
+              </a:spcAft>
+              <a:defRPr sz="1600">
+                <a:solidFill>
+                  <a:srgbClr val="1E293B"/>
+                </a:solidFill>
+              </a:defRPr>
+            </a:pPr>
+            <a:r>
+              <a:t>Q: SLA 已过期会怎样？</a:t>
+            </a:r>
+          </a:p>
+          <a:p>
+            <a:pPr>
+              <a:spcAft>
+                <a:spcPts val="600"/>
+              </a:spcAft>
+              <a:defRPr sz="1600">
+                <a:solidFill>
+                  <a:srgbClr val="1E293B"/>
+                </a:solidFill>
+              </a:defRPr>
+            </a:pPr>
+            <a:r>
+              <a:t>A: 工单状态正常不变，但在仪表盘 SLA 统计中记为未达标</a:t>
+            </a:r>
+          </a:p>
+          <a:p>
+            <a:pPr>
+              <a:spcAft>
+                <a:spcPts val="600"/>
+              </a:spcAft>
+              <a:defRPr sz="1600">
+                <a:solidFill>
+                  <a:srgbClr val="1E293B"/>
+                </a:solidFill>
+              </a:defRPr>
+            </a:pPr>
+          </a:p>
+          <a:p>
+            <a:pPr>
+              <a:spcAft>
+                <a:spcPts val="600"/>
+              </a:spcAft>
+              <a:defRPr sz="1600">
+                <a:solidFill>
+                  <a:srgbClr val="1E293B"/>
+                </a:solidFill>
+              </a:defRPr>
+            </a:pPr>
+            <a:r>
+              <a:t>Q: 支持手机访问吗？</a:t>
+            </a:r>
+          </a:p>
+          <a:p>
+            <a:pPr>
+              <a:spcAft>
+                <a:spcPts val="600"/>
+              </a:spcAft>
+              <a:defRPr sz="1600">
+                <a:solidFill>
+                  <a:srgbClr val="1E293B"/>
+                </a:solidFill>
+              </a:defRPr>
+            </a:pPr>
+            <a:r>
+              <a:t>A: 支持！系统采用响应式设计，适配手机/平板/桌面</a:t>
+            </a:r>
+          </a:p>
+          <a:p>
+            <a:pPr>
+              <a:spcAft>
+                <a:spcPts val="600"/>
+              </a:spcAft>
+              <a:defRPr sz="1600">
+                <a:solidFill>
+                  <a:srgbClr val="1E293B"/>
+                </a:solidFill>
+              </a:defRPr>
+            </a:pPr>
+          </a:p>
+          <a:p>
+            <a:pPr>
+              <a:spcAft>
+                <a:spcPts val="600"/>
+              </a:spcAft>
+              <a:defRPr sz="1600">
+                <a:solidFill>
+                  <a:srgbClr val="1E293B"/>
+                </a:solidFill>
+              </a:defRPr>
+            </a:pPr>
+            <a:r>
+              <a:t>Q: 数据如何备份？</a:t>
+            </a:r>
+          </a:p>
+          <a:p>
+            <a:pPr>
+              <a:spcAft>
+                <a:spcPts val="600"/>
+              </a:spcAft>
+              <a:defRPr sz="1600">
+                <a:solidFill>
+                  <a:srgbClr val="1E293B"/>
+                </a:solidFill>
+              </a:defRPr>
+            </a:pPr>
+            <a:r>
+              <a:t>A: 参考运维手册，使用 pg_dump 定期备份 PostgreSQL</a:t>
+            </a:r>
+          </a:p>
+          <a:p>
+            <a:pPr>
+              <a:spcAft>
+                <a:spcPts val="600"/>
+              </a:spcAft>
+              <a:defRPr sz="1600">
+                <a:solidFill>
+                  <a:srgbClr val="1E293B"/>
+                </a:solidFill>
+              </a:defRPr>
+            </a:pPr>
+          </a:p>
+          <a:p>
+            <a:pPr>
+              <a:spcAft>
+                <a:spcPts val="600"/>
+              </a:spcAft>
+              <a:defRPr sz="1600">
+                <a:solidFill>
+                  <a:srgbClr val="1E293B"/>
+                </a:solidFill>
+              </a:defRPr>
+            </a:pPr>
+            <a:r>
+              <a:t>📞 技术支持：参考项目交接清单</a:t>
+            </a:r>
+          </a:p>
+        </p:txBody>
+      </p:sp>
+      <p:sp>
+        <p:nvSpPr>
+          <p:cNvPr id="4" name="TextBox 3"/>
+          <p:cNvSpPr txBox="1"/>
+          <p:nvPr/>
+        </p:nvSpPr>
+        <p:spPr>
+          <a:xfrm>
+            <a:off x="457200" y="6309360"/>
+            <a:ext cx="10972800" cy="365760"/>
+          </a:xfrm>
+          <a:prstGeom prst="rect">
+            <a:avLst/>
+          </a:prstGeom>
+          <a:noFill/>
+        </p:spPr>
+        <p:txBody>
+          <a:bodyPr wrap="none">
+            <a:spAutoFit/>
+          </a:bodyPr>
+          <a:lstStyle/>
+          <a:p>
+            <a:pPr>
+              <a:defRPr sz="1100">
+                <a:solidFill>
+                  <a:srgbClr val="6B7280"/>
+                </a:solidFill>
+              </a:defRPr>
+            </a:pPr>
+            <a:r>
+              <a:t>IT工单系统 · 培训材料          17</a:t>
+            </a:r>
+          </a:p>
+        </p:txBody>
+      </p:sp>
+    </p:spTree>
+  </p:cSld>
+  <p:clrMapOvr>
+    <a:masterClrMapping/>
+  </p:clrMapOvr>
+</p:sld>
+</file>
+
+<file path=ppt/slides/slide18.xml><?xml version="1.0" encoding="utf-8"?>
 <p:sld xmlns:a="http://schemas.openxmlformats.org/drawingml/2006/main" xmlns:p="http://schemas.openxmlformats.org/presentationml/2006/main" xmlns:r="http://schemas.openxmlformats.org/officeDocument/2006/relationships">
   <p:cSld>
     <p:bg>
@@ -5186,7 +5976,7 @@
               </a:defRPr>
             </a:pPr>
             <a:r>
-              <a:t>IT工单系统 · 培训材料          15</a:t>
+              <a:t>IT工单系统 · 培训材料          18</a:t>
             </a:r>
           </a:p>
         </p:txBody>
@@ -5260,8 +6050,8 @@
         </p:nvSpPr>
         <p:spPr>
           <a:xfrm>
-            <a:off x="914400" y="1463040"/>
-            <a:ext cx="10058400" cy="4572000"/>
+            <a:off x="1371600" y="1645920"/>
+            <a:ext cx="9144000" cy="4572000"/>
           </a:xfrm>
           <a:prstGeom prst="rect">
             <a:avLst/>
@@ -5278,7 +6068,7 @@
               <a:spcAft>
                 <a:spcPts val="600"/>
               </a:spcAft>
-              <a:defRPr sz="1600">
+              <a:defRPr sz="1800">
                 <a:solidFill>
                   <a:srgbClr val="1E293B"/>
                 </a:solidFill>
@@ -5293,7 +6083,7 @@
               <a:spcAft>
                 <a:spcPts val="600"/>
               </a:spcAft>
-              <a:defRPr sz="1600">
+              <a:defRPr sz="1800">
                 <a:solidFill>
                   <a:srgbClr val="1E293B"/>
                 </a:solidFill>
@@ -5308,89 +6098,104 @@
               <a:spcAft>
                 <a:spcPts val="600"/>
               </a:spcAft>
-              <a:defRPr sz="1600">
-                <a:solidFill>
-                  <a:srgbClr val="1E293B"/>
-                </a:solidFill>
-              </a:defRPr>
-            </a:pPr>
-            <a:r>
-              <a:t>03  工单管理 — 创建、流转、指派</a:t>
-            </a:r>
-          </a:p>
-          <a:p>
-            <a:pPr>
-              <a:spcAft>
-                <a:spcPts val="600"/>
-              </a:spcAft>
-              <a:defRPr sz="1600">
-                <a:solidFill>
-                  <a:srgbClr val="1E293B"/>
-                </a:solidFill>
-              </a:defRPr>
-            </a:pPr>
-            <a:r>
-              <a:t>04  仪表盘 — 数据可视化</a:t>
-            </a:r>
-          </a:p>
-          <a:p>
-            <a:pPr>
-              <a:spcAft>
-                <a:spcPts val="600"/>
-              </a:spcAft>
-              <a:defRPr sz="1600">
-                <a:solidFill>
-                  <a:srgbClr val="1E293B"/>
-                </a:solidFill>
-              </a:defRPr>
-            </a:pPr>
-            <a:r>
-              <a:t>05  SLA 管理规则</a:t>
-            </a:r>
-          </a:p>
-          <a:p>
-            <a:pPr>
-              <a:spcAft>
-                <a:spcPts val="600"/>
-              </a:spcAft>
-              <a:defRPr sz="1600">
-                <a:solidFill>
-                  <a:srgbClr val="1E293B"/>
-                </a:solidFill>
-              </a:defRPr>
-            </a:pPr>
-            <a:r>
-              <a:t>06  管理员后台</a:t>
-            </a:r>
-          </a:p>
-          <a:p>
-            <a:pPr>
-              <a:spcAft>
-                <a:spcPts val="600"/>
-              </a:spcAft>
-              <a:defRPr sz="1600">
-                <a:solidFill>
-                  <a:srgbClr val="1E293B"/>
-                </a:solidFill>
-              </a:defRPr>
-            </a:pPr>
-            <a:r>
-              <a:t>07  实操演练</a:t>
-            </a:r>
-          </a:p>
-          <a:p>
-            <a:pPr>
-              <a:spcAft>
-                <a:spcPts val="600"/>
-              </a:spcAft>
-              <a:defRPr sz="1600">
-                <a:solidFill>
-                  <a:srgbClr val="1E293B"/>
-                </a:solidFill>
-              </a:defRPr>
-            </a:pPr>
-            <a:r>
-              <a:t>08  常见问题与支持</a:t>
+              <a:defRPr sz="1800">
+                <a:solidFill>
+                  <a:srgbClr val="1E293B"/>
+                </a:solidFill>
+              </a:defRPr>
+            </a:pPr>
+            <a:r>
+              <a:t>03  系统截图一览</a:t>
+            </a:r>
+          </a:p>
+          <a:p>
+            <a:pPr>
+              <a:spcAft>
+                <a:spcPts val="600"/>
+              </a:spcAft>
+              <a:defRPr sz="1800">
+                <a:solidFill>
+                  <a:srgbClr val="1E293B"/>
+                </a:solidFill>
+              </a:defRPr>
+            </a:pPr>
+            <a:r>
+              <a:t>04  工单管理 — 创建、流转、指派</a:t>
+            </a:r>
+          </a:p>
+          <a:p>
+            <a:pPr>
+              <a:spcAft>
+                <a:spcPts val="600"/>
+              </a:spcAft>
+              <a:defRPr sz="1800">
+                <a:solidFill>
+                  <a:srgbClr val="1E293B"/>
+                </a:solidFill>
+              </a:defRPr>
+            </a:pPr>
+            <a:r>
+              <a:t>05  仪表盘 — 数据可视化</a:t>
+            </a:r>
+          </a:p>
+          <a:p>
+            <a:pPr>
+              <a:spcAft>
+                <a:spcPts val="600"/>
+              </a:spcAft>
+              <a:defRPr sz="1800">
+                <a:solidFill>
+                  <a:srgbClr val="1E293B"/>
+                </a:solidFill>
+              </a:defRPr>
+            </a:pPr>
+            <a:r>
+              <a:t>06  SLA 管理规则</a:t>
+            </a:r>
+          </a:p>
+          <a:p>
+            <a:pPr>
+              <a:spcAft>
+                <a:spcPts val="600"/>
+              </a:spcAft>
+              <a:defRPr sz="1800">
+                <a:solidFill>
+                  <a:srgbClr val="1E293B"/>
+                </a:solidFill>
+              </a:defRPr>
+            </a:pPr>
+            <a:r>
+              <a:t>07  管理员后台</a:t>
+            </a:r>
+          </a:p>
+          <a:p>
+            <a:pPr>
+              <a:spcAft>
+                <a:spcPts val="600"/>
+              </a:spcAft>
+              <a:defRPr sz="1800">
+                <a:solidFill>
+                  <a:srgbClr val="1E293B"/>
+                </a:solidFill>
+              </a:defRPr>
+            </a:pPr>
+            <a:r>
+              <a:t>08  实操演练</a:t>
+            </a:r>
+          </a:p>
+          <a:p>
+            <a:pPr>
+              <a:spcAft>
+                <a:spcPts val="600"/>
+              </a:spcAft>
+              <a:defRPr sz="1800">
+                <a:solidFill>
+                  <a:srgbClr val="1E293B"/>
+                </a:solidFill>
+              </a:defRPr>
+            </a:pPr>
+            <a:r>
+              <a:t>09  常见问题与支持</a:t>
             </a:r>
           </a:p>
         </p:txBody>
@@ -5727,7 +6532,7 @@
         </p:nvSpPr>
         <p:spPr>
           <a:xfrm>
-            <a:off x="457200" y="548640"/>
+            <a:off x="457200" y="365760"/>
             <a:ext cx="10972800" cy="914400"/>
           </a:xfrm>
           <a:prstGeom prst="rect">
@@ -5742,28 +6547,52 @@
           <a:lstStyle/>
           <a:p>
             <a:pPr>
-              <a:defRPr sz="3200" b="1">
-                <a:solidFill>
-                  <a:srgbClr val="1E293B"/>
-                </a:solidFill>
-              </a:defRPr>
-            </a:pPr>
-            <a:r>
-              <a:t>02  用户角色与权限</a:t>
-            </a:r>
-          </a:p>
-        </p:txBody>
-      </p:sp>
-      <p:sp>
-        <p:nvSpPr>
-          <p:cNvPr id="3" name="TextBox 2"/>
+              <a:defRPr sz="2800" b="1">
+                <a:solidFill>
+                  <a:srgbClr val="1E293B"/>
+                </a:solidFill>
+              </a:defRPr>
+            </a:pPr>
+            <a:r>
+              <a:t>📋 工单列表页 — 工单管理主界面</a:t>
+            </a:r>
+          </a:p>
+        </p:txBody>
+      </p:sp>
+      <p:pic>
+        <p:nvPicPr>
+          <p:cNvPr id="3" name="Picture 2" descr="screenshot-tickets.png"/>
+          <p:cNvPicPr>
+            <a:picLocks noChangeAspect="1"/>
+          </p:cNvPicPr>
+          <p:nvPr/>
+        </p:nvPicPr>
+        <p:blipFill>
+          <a:blip r:embed="rId2"/>
+          <a:stretch>
+            <a:fillRect/>
+          </a:stretch>
+        </p:blipFill>
+        <p:spPr>
+          <a:xfrm>
+            <a:off x="457200" y="1005840"/>
+            <a:ext cx="11247120" cy="4846320"/>
+          </a:xfrm>
+          <a:prstGeom prst="rect">
+            <a:avLst/>
+          </a:prstGeom>
+        </p:spPr>
+      </p:pic>
+      <p:sp>
+        <p:nvSpPr>
+          <p:cNvPr id="4" name="TextBox 3"/>
           <p:cNvSpPr txBox="1"/>
           <p:nvPr/>
         </p:nvSpPr>
         <p:spPr>
           <a:xfrm>
-            <a:off x="914400" y="1463040"/>
-            <a:ext cx="10058400" cy="4572000"/>
+            <a:off x="731520" y="5989320"/>
+            <a:ext cx="10515600" cy="320040"/>
           </a:xfrm>
           <a:prstGeom prst="rect">
             <a:avLst/>
@@ -5771,204 +6600,27 @@
           <a:noFill/>
         </p:spPr>
         <p:txBody>
-          <a:bodyPr wrap="square">
+          <a:bodyPr wrap="none">
             <a:spAutoFit/>
           </a:bodyPr>
           <a:lstStyle/>
           <a:p>
             <a:pPr>
-              <a:spcAft>
-                <a:spcPts val="600"/>
-              </a:spcAft>
-              <a:defRPr sz="1600">
-                <a:solidFill>
-                  <a:srgbClr val="1E293B"/>
-                </a:solidFill>
-              </a:defRPr>
-            </a:pPr>
-            <a:r>
-              <a:t>🔧 系统管理员 (admin)</a:t>
-            </a:r>
-          </a:p>
-          <a:p>
-            <a:pPr>
-              <a:spcAft>
-                <a:spcPts val="600"/>
-              </a:spcAft>
-              <a:defRPr sz="1600">
-                <a:solidFill>
-                  <a:srgbClr val="1E293B"/>
-                </a:solidFill>
-              </a:defRPr>
-            </a:pPr>
-            <a:r>
-              <a:t>    • 管理用户账号（新增/编辑/启禁用）</a:t>
-            </a:r>
-          </a:p>
-          <a:p>
-            <a:pPr>
-              <a:spcAft>
-                <a:spcPts val="600"/>
-              </a:spcAft>
-              <a:defRPr sz="1600">
-                <a:solidFill>
-                  <a:srgbClr val="1E293B"/>
-                </a:solidFill>
-              </a:defRPr>
-            </a:pPr>
-            <a:r>
-              <a:t>    • 配置权限流转表、SLA 标准、工作日</a:t>
-            </a:r>
-          </a:p>
-          <a:p>
-            <a:pPr>
-              <a:spcAft>
-                <a:spcPts val="600"/>
-              </a:spcAft>
-              <a:defRPr sz="1600">
-                <a:solidFill>
-                  <a:srgbClr val="1E293B"/>
-                </a:solidFill>
-              </a:defRPr>
-            </a:pPr>
-            <a:r>
-              <a:t>    • 查看全部工单与仪表盘数据</a:t>
-            </a:r>
-          </a:p>
-          <a:p>
-            <a:pPr>
-              <a:spcAft>
-                <a:spcPts val="600"/>
-              </a:spcAft>
-              <a:defRPr sz="1600">
-                <a:solidFill>
-                  <a:srgbClr val="1E293B"/>
-                </a:solidFill>
-              </a:defRPr>
-            </a:pPr>
-          </a:p>
-          <a:p>
-            <a:pPr>
-              <a:spcAft>
-                <a:spcPts val="600"/>
-              </a:spcAft>
-              <a:defRPr sz="1600">
-                <a:solidFill>
-                  <a:srgbClr val="1E293B"/>
-                </a:solidFill>
-              </a:defRPr>
-            </a:pPr>
-            <a:r>
-              <a:t>👨‍💻 IT 人员 (it_staff)</a:t>
-            </a:r>
-          </a:p>
-          <a:p>
-            <a:pPr>
-              <a:spcAft>
-                <a:spcPts val="600"/>
-              </a:spcAft>
-              <a:defRPr sz="1600">
-                <a:solidFill>
-                  <a:srgbClr val="1E293B"/>
-                </a:solidFill>
-              </a:defRPr>
-            </a:pPr>
-            <a:r>
-              <a:t>    • 处理分配给自己的工单</a:t>
-            </a:r>
-          </a:p>
-          <a:p>
-            <a:pPr>
-              <a:spcAft>
-                <a:spcPts val="600"/>
-              </a:spcAft>
-              <a:defRPr sz="1600">
-                <a:solidFill>
-                  <a:srgbClr val="1E293B"/>
-                </a:solidFill>
-              </a:defRPr>
-            </a:pPr>
-            <a:r>
-              <a:t>    • 修改工单状态、添加备注、上传附件</a:t>
-            </a:r>
-          </a:p>
-          <a:p>
-            <a:pPr>
-              <a:spcAft>
-                <a:spcPts val="600"/>
-              </a:spcAft>
-              <a:defRPr sz="1600">
-                <a:solidFill>
-                  <a:srgbClr val="1E293B"/>
-                </a:solidFill>
-              </a:defRPr>
-            </a:pPr>
-            <a:r>
-              <a:t>    • 查看仪表盘（排行榜、热力图等）</a:t>
-            </a:r>
-          </a:p>
-          <a:p>
-            <a:pPr>
-              <a:spcAft>
-                <a:spcPts val="600"/>
-              </a:spcAft>
-              <a:defRPr sz="1600">
-                <a:solidFill>
-                  <a:srgbClr val="1E293B"/>
-                </a:solidFill>
-              </a:defRPr>
-            </a:pPr>
-          </a:p>
-          <a:p>
-            <a:pPr>
-              <a:spcAft>
-                <a:spcPts val="600"/>
-              </a:spcAft>
-              <a:defRPr sz="1600">
-                <a:solidFill>
-                  <a:srgbClr val="1E293B"/>
-                </a:solidFill>
-              </a:defRPr>
-            </a:pPr>
-            <a:r>
-              <a:t>👤 普通用户</a:t>
-            </a:r>
-          </a:p>
-          <a:p>
-            <a:pPr>
-              <a:spcAft>
-                <a:spcPts val="600"/>
-              </a:spcAft>
-              <a:defRPr sz="1600">
-                <a:solidFill>
-                  <a:srgbClr val="1E293B"/>
-                </a:solidFill>
-              </a:defRPr>
-            </a:pPr>
-            <a:r>
-              <a:t>    • 提交工单（标题/描述/分类/优先级）</a:t>
-            </a:r>
-          </a:p>
-          <a:p>
-            <a:pPr>
-              <a:spcAft>
-                <a:spcPts val="600"/>
-              </a:spcAft>
-              <a:defRPr sz="1600">
-                <a:solidFill>
-                  <a:srgbClr val="1E293B"/>
-                </a:solidFill>
-              </a:defRPr>
-            </a:pPr>
-            <a:r>
-              <a:t>    • 无需登录即可创建工单</a:t>
-            </a:r>
-          </a:p>
-        </p:txBody>
-      </p:sp>
-      <p:sp>
-        <p:nvSpPr>
-          <p:cNvPr id="4" name="TextBox 3"/>
+              <a:defRPr sz="1200" i="1">
+                <a:solidFill>
+                  <a:srgbClr val="6B7280"/>
+                </a:solidFill>
+              </a:defRPr>
+            </a:pPr>
+            <a:r>
+              <a:t>▲ 支持全文搜索、状态标签筛选、分页浏览，是日常工单处理的核心入口</a:t>
+            </a:r>
+          </a:p>
+        </p:txBody>
+      </p:sp>
+      <p:sp>
+        <p:nvSpPr>
+          <p:cNvPr id="5" name="TextBox 4"/>
           <p:cNvSpPr txBox="1"/>
           <p:nvPr/>
         </p:nvSpPr>
@@ -6035,7 +6687,7 @@
         </p:nvSpPr>
         <p:spPr>
           <a:xfrm>
-            <a:off x="457200" y="548640"/>
+            <a:off x="457200" y="365760"/>
             <a:ext cx="10972800" cy="914400"/>
           </a:xfrm>
           <a:prstGeom prst="rect">
@@ -6050,28 +6702,52 @@
           <a:lstStyle/>
           <a:p>
             <a:pPr>
-              <a:defRPr sz="3200" b="1">
-                <a:solidFill>
-                  <a:srgbClr val="1E293B"/>
-                </a:solidFill>
-              </a:defRPr>
-            </a:pPr>
-            <a:r>
-              <a:t>03  工单生命周期</a:t>
-            </a:r>
-          </a:p>
-        </p:txBody>
-      </p:sp>
-      <p:sp>
-        <p:nvSpPr>
-          <p:cNvPr id="3" name="TextBox 2"/>
+              <a:defRPr sz="2800" b="1">
+                <a:solidFill>
+                  <a:srgbClr val="1E293B"/>
+                </a:solidFill>
+              </a:defRPr>
+            </a:pPr>
+            <a:r>
+              <a:t>📊 仪表盘 — 数据可视化总览</a:t>
+            </a:r>
+          </a:p>
+        </p:txBody>
+      </p:sp>
+      <p:pic>
+        <p:nvPicPr>
+          <p:cNvPr id="3" name="Picture 2" descr="screenshot-dashboard.png"/>
+          <p:cNvPicPr>
+            <a:picLocks noChangeAspect="1"/>
+          </p:cNvPicPr>
+          <p:nvPr/>
+        </p:nvPicPr>
+        <p:blipFill>
+          <a:blip r:embed="rId2"/>
+          <a:stretch>
+            <a:fillRect/>
+          </a:stretch>
+        </p:blipFill>
+        <p:spPr>
+          <a:xfrm>
+            <a:off x="457200" y="1005840"/>
+            <a:ext cx="11247120" cy="4846320"/>
+          </a:xfrm>
+          <a:prstGeom prst="rect">
+            <a:avLst/>
+          </a:prstGeom>
+        </p:spPr>
+      </p:pic>
+      <p:sp>
+        <p:nvSpPr>
+          <p:cNvPr id="4" name="TextBox 3"/>
           <p:cNvSpPr txBox="1"/>
           <p:nvPr/>
         </p:nvSpPr>
         <p:spPr>
           <a:xfrm>
-            <a:off x="914400" y="1463040"/>
-            <a:ext cx="10058400" cy="4572000"/>
+            <a:off x="731520" y="5989320"/>
+            <a:ext cx="10515600" cy="320040"/>
           </a:xfrm>
           <a:prstGeom prst="rect">
             <a:avLst/>
@@ -6079,201 +6755,27 @@
           <a:noFill/>
         </p:spPr>
         <p:txBody>
-          <a:bodyPr wrap="square">
+          <a:bodyPr wrap="none">
             <a:spAutoFit/>
           </a:bodyPr>
           <a:lstStyle/>
           <a:p>
             <a:pPr>
-              <a:spcAft>
-                <a:spcPts val="600"/>
-              </a:spcAft>
-              <a:defRPr sz="1600">
-                <a:solidFill>
-                  <a:srgbClr val="1E293B"/>
-                </a:solidFill>
-              </a:defRPr>
-            </a:pPr>
-            <a:r>
-              <a:t>标准流程：</a:t>
-            </a:r>
-          </a:p>
-          <a:p>
-            <a:pPr>
-              <a:spcAft>
-                <a:spcPts val="600"/>
-              </a:spcAft>
-              <a:defRPr sz="1600">
-                <a:solidFill>
-                  <a:srgbClr val="1E293B"/>
-                </a:solidFill>
-              </a:defRPr>
-            </a:pPr>
-            <a:r>
-              <a:t>  待处理 ──→ 处理中 ──→ 已完成 ✅</a:t>
-            </a:r>
-          </a:p>
-          <a:p>
-            <a:pPr>
-              <a:spcAft>
-                <a:spcPts val="600"/>
-              </a:spcAft>
-              <a:defRPr sz="1600">
-                <a:solidFill>
-                  <a:srgbClr val="1E293B"/>
-                </a:solidFill>
-              </a:defRPr>
-            </a:pPr>
-          </a:p>
-          <a:p>
-            <a:pPr>
-              <a:spcAft>
-                <a:spcPts val="600"/>
-              </a:spcAft>
-              <a:defRPr sz="1600">
-                <a:solidFill>
-                  <a:srgbClr val="1E293B"/>
-                </a:solidFill>
-              </a:defRPr>
-            </a:pPr>
-            <a:r>
-              <a:t>升级流程：</a:t>
-            </a:r>
-          </a:p>
-          <a:p>
-            <a:pPr>
-              <a:spcAft>
-                <a:spcPts val="600"/>
-              </a:spcAft>
-              <a:defRPr sz="1600">
-                <a:solidFill>
-                  <a:srgbClr val="1E293B"/>
-                </a:solidFill>
-              </a:defRPr>
-            </a:pPr>
-            <a:r>
-              <a:t>  待处理 ──→ 处理中 ──→ 已升级 ──→ 已完成 ⬆️</a:t>
-            </a:r>
-          </a:p>
-          <a:p>
-            <a:pPr>
-              <a:spcAft>
-                <a:spcPts val="600"/>
-              </a:spcAft>
-              <a:defRPr sz="1600">
-                <a:solidFill>
-                  <a:srgbClr val="1E293B"/>
-                </a:solidFill>
-              </a:defRPr>
-            </a:pPr>
-            <a:r>
-              <a:t>             (指派他人处理)</a:t>
-            </a:r>
-          </a:p>
-          <a:p>
-            <a:pPr>
-              <a:spcAft>
-                <a:spcPts val="600"/>
-              </a:spcAft>
-              <a:defRPr sz="1600">
-                <a:solidFill>
-                  <a:srgbClr val="1E293B"/>
-                </a:solidFill>
-              </a:defRPr>
-            </a:pPr>
-          </a:p>
-          <a:p>
-            <a:pPr>
-              <a:spcAft>
-                <a:spcPts val="600"/>
-              </a:spcAft>
-              <a:defRPr sz="1600">
-                <a:solidFill>
-                  <a:srgbClr val="1E293B"/>
-                </a:solidFill>
-              </a:defRPr>
-            </a:pPr>
-            <a:r>
-              <a:t>退回流程：</a:t>
-            </a:r>
-          </a:p>
-          <a:p>
-            <a:pPr>
-              <a:spcAft>
-                <a:spcPts val="600"/>
-              </a:spcAft>
-              <a:defRPr sz="1600">
-                <a:solidFill>
-                  <a:srgbClr val="1E293B"/>
-                </a:solidFill>
-              </a:defRPr>
-            </a:pPr>
-            <a:r>
-              <a:t>  已完成 ──→ 处理中 ──→ 已完成 🔄</a:t>
-            </a:r>
-          </a:p>
-          <a:p>
-            <a:pPr>
-              <a:spcAft>
-                <a:spcPts val="600"/>
-              </a:spcAft>
-              <a:defRPr sz="1600">
-                <a:solidFill>
-                  <a:srgbClr val="1E293B"/>
-                </a:solidFill>
-              </a:defRPr>
-            </a:pPr>
-            <a:r>
-              <a:t>  (质量不合要求，退回重做)</a:t>
-            </a:r>
-          </a:p>
-          <a:p>
-            <a:pPr>
-              <a:spcAft>
-                <a:spcPts val="600"/>
-              </a:spcAft>
-              <a:defRPr sz="1600">
-                <a:solidFill>
-                  <a:srgbClr val="1E293B"/>
-                </a:solidFill>
-              </a:defRPr>
-            </a:pPr>
-          </a:p>
-          <a:p>
-            <a:pPr>
-              <a:spcAft>
-                <a:spcPts val="600"/>
-              </a:spcAft>
-              <a:defRPr sz="1600">
-                <a:solidFill>
-                  <a:srgbClr val="1E293B"/>
-                </a:solidFill>
-              </a:defRPr>
-            </a:pPr>
-            <a:r>
-              <a:t>取消流程：</a:t>
-            </a:r>
-          </a:p>
-          <a:p>
-            <a:pPr>
-              <a:spcAft>
-                <a:spcPts val="600"/>
-              </a:spcAft>
-              <a:defRPr sz="1600">
-                <a:solidFill>
-                  <a:srgbClr val="1E293B"/>
-                </a:solidFill>
-              </a:defRPr>
-            </a:pPr>
-            <a:r>
-              <a:t>  待处理 / 处理中 ──→ 已取消 ❌</a:t>
-            </a:r>
-          </a:p>
-        </p:txBody>
-      </p:sp>
-      <p:sp>
-        <p:nvSpPr>
-          <p:cNvPr id="4" name="TextBox 3"/>
+              <a:defRPr sz="1200" i="1">
+                <a:solidFill>
+                  <a:srgbClr val="6B7280"/>
+                </a:solidFill>
+              </a:defRPr>
+            </a:pPr>
+            <a:r>
+              <a:t>▲ 摘要卡片 + 排行榜 + 热力图 + 工作负载 + 多种图表，一页掌握全局</a:t>
+            </a:r>
+          </a:p>
+        </p:txBody>
+      </p:sp>
+      <p:sp>
+        <p:nvSpPr>
+          <p:cNvPr id="5" name="TextBox 4"/>
           <p:cNvSpPr txBox="1"/>
           <p:nvPr/>
         </p:nvSpPr>
@@ -6340,7 +6842,7 @@
         </p:nvSpPr>
         <p:spPr>
           <a:xfrm>
-            <a:off x="457200" y="548640"/>
+            <a:off x="457200" y="365760"/>
             <a:ext cx="10972800" cy="914400"/>
           </a:xfrm>
           <a:prstGeom prst="rect">
@@ -6355,28 +6857,52 @@
           <a:lstStyle/>
           <a:p>
             <a:pPr>
-              <a:defRPr sz="3200" b="1">
-                <a:solidFill>
-                  <a:srgbClr val="1E293B"/>
-                </a:solidFill>
-              </a:defRPr>
-            </a:pPr>
-            <a:r>
-              <a:t>03  创建工单演示</a:t>
-            </a:r>
-          </a:p>
-        </p:txBody>
-      </p:sp>
-      <p:sp>
-        <p:nvSpPr>
-          <p:cNvPr id="3" name="TextBox 2"/>
+              <a:defRPr sz="2800" b="1">
+                <a:solidFill>
+                  <a:srgbClr val="1E293B"/>
+                </a:solidFill>
+              </a:defRPr>
+            </a:pPr>
+            <a:r>
+              <a:t>📝 工单详情页 — 状态流转与处理记录</a:t>
+            </a:r>
+          </a:p>
+        </p:txBody>
+      </p:sp>
+      <p:pic>
+        <p:nvPicPr>
+          <p:cNvPr id="3" name="Picture 2" descr="screenshot-detail.png"/>
+          <p:cNvPicPr>
+            <a:picLocks noChangeAspect="1"/>
+          </p:cNvPicPr>
+          <p:nvPr/>
+        </p:nvPicPr>
+        <p:blipFill>
+          <a:blip r:embed="rId2"/>
+          <a:stretch>
+            <a:fillRect/>
+          </a:stretch>
+        </p:blipFill>
+        <p:spPr>
+          <a:xfrm>
+            <a:off x="457200" y="1005840"/>
+            <a:ext cx="11247120" cy="4846320"/>
+          </a:xfrm>
+          <a:prstGeom prst="rect">
+            <a:avLst/>
+          </a:prstGeom>
+        </p:spPr>
+      </p:pic>
+      <p:sp>
+        <p:nvSpPr>
+          <p:cNvPr id="4" name="TextBox 3"/>
           <p:cNvSpPr txBox="1"/>
           <p:nvPr/>
         </p:nvSpPr>
         <p:spPr>
           <a:xfrm>
-            <a:off x="914400" y="1463040"/>
-            <a:ext cx="10058400" cy="4572000"/>
+            <a:off x="731520" y="5989320"/>
+            <a:ext cx="10515600" cy="320040"/>
           </a:xfrm>
           <a:prstGeom prst="rect">
             <a:avLst/>
@@ -6384,201 +6910,27 @@
           <a:noFill/>
         </p:spPr>
         <p:txBody>
-          <a:bodyPr wrap="square">
+          <a:bodyPr wrap="none">
             <a:spAutoFit/>
           </a:bodyPr>
           <a:lstStyle/>
           <a:p>
             <a:pPr>
-              <a:spcAft>
-                <a:spcPts val="600"/>
-              </a:spcAft>
-              <a:defRPr sz="1600">
-                <a:solidFill>
-                  <a:srgbClr val="1E293B"/>
-                </a:solidFill>
-              </a:defRPr>
-            </a:pPr>
-            <a:r>
-              <a:t>操作路径：导航栏 →  ➕ 创建工单</a:t>
-            </a:r>
-          </a:p>
-          <a:p>
-            <a:pPr>
-              <a:spcAft>
-                <a:spcPts val="600"/>
-              </a:spcAft>
-              <a:defRPr sz="1600">
-                <a:solidFill>
-                  <a:srgbClr val="1E293B"/>
-                </a:solidFill>
-              </a:defRPr>
-            </a:pPr>
-          </a:p>
-          <a:p>
-            <a:pPr>
-              <a:spcAft>
-                <a:spcPts val="600"/>
-              </a:spcAft>
-              <a:defRPr sz="1600">
-                <a:solidFill>
-                  <a:srgbClr val="1E293B"/>
-                </a:solidFill>
-              </a:defRPr>
-            </a:pPr>
-            <a:r>
-              <a:t>填写字段：</a:t>
-            </a:r>
-          </a:p>
-          <a:p>
-            <a:pPr>
-              <a:spcAft>
-                <a:spcPts val="600"/>
-              </a:spcAft>
-              <a:defRPr sz="1600">
-                <a:solidFill>
-                  <a:srgbClr val="1E293B"/>
-                </a:solidFill>
-              </a:defRPr>
-            </a:pPr>
-            <a:r>
-              <a:t>  📝 标题（必填）    — 简要描述问题</a:t>
-            </a:r>
-          </a:p>
-          <a:p>
-            <a:pPr>
-              <a:spcAft>
-                <a:spcPts val="600"/>
-              </a:spcAft>
-              <a:defRPr sz="1600">
-                <a:solidFill>
-                  <a:srgbClr val="1E293B"/>
-                </a:solidFill>
-              </a:defRPr>
-            </a:pPr>
-            <a:r>
-              <a:t>  📄 问题描述         — 详细说明，可直接粘贴截图</a:t>
-            </a:r>
-          </a:p>
-          <a:p>
-            <a:pPr>
-              <a:spcAft>
-                <a:spcPts val="600"/>
-              </a:spcAft>
-              <a:defRPr sz="1600">
-                <a:solidFill>
-                  <a:srgbClr val="1E293B"/>
-                </a:solidFill>
-              </a:defRPr>
-            </a:pPr>
-            <a:r>
-              <a:t>  📁 分类             — 硬件 / 软件 / 网络 / 账号 / 其他</a:t>
-            </a:r>
-          </a:p>
-          <a:p>
-            <a:pPr>
-              <a:spcAft>
-                <a:spcPts val="600"/>
-              </a:spcAft>
-              <a:defRPr sz="1600">
-                <a:solidFill>
-                  <a:srgbClr val="1E293B"/>
-                </a:solidFill>
-              </a:defRPr>
-            </a:pPr>
-            <a:r>
-              <a:t>  ⚡ 优先级           — 低 / 中 / 高 / 紧急</a:t>
-            </a:r>
-          </a:p>
-          <a:p>
-            <a:pPr>
-              <a:spcAft>
-                <a:spcPts val="600"/>
-              </a:spcAft>
-              <a:defRPr sz="1600">
-                <a:solidFill>
-                  <a:srgbClr val="1E293B"/>
-                </a:solidFill>
-              </a:defRPr>
-            </a:pPr>
-            <a:r>
-              <a:t>  👤 您的姓名         — 创建人</a:t>
-            </a:r>
-          </a:p>
-          <a:p>
-            <a:pPr>
-              <a:spcAft>
-                <a:spcPts val="600"/>
-              </a:spcAft>
-              <a:defRPr sz="1600">
-                <a:solidFill>
-                  <a:srgbClr val="1E293B"/>
-                </a:solidFill>
-              </a:defRPr>
-            </a:pPr>
-          </a:p>
-          <a:p>
-            <a:pPr>
-              <a:spcAft>
-                <a:spcPts val="600"/>
-              </a:spcAft>
-              <a:defRPr sz="1600">
-                <a:solidFill>
-                  <a:srgbClr val="1E293B"/>
-                </a:solidFill>
-              </a:defRPr>
-            </a:pPr>
-            <a:r>
-              <a:t>分类与权重：</a:t>
-            </a:r>
-          </a:p>
-          <a:p>
-            <a:pPr>
-              <a:spcAft>
-                <a:spcPts val="600"/>
-              </a:spcAft>
-              <a:defRPr sz="1600">
-                <a:solidFill>
-                  <a:srgbClr val="1E293B"/>
-                </a:solidFill>
-              </a:defRPr>
-            </a:pPr>
-            <a:r>
-              <a:t>  硬件 (×2.0)  &gt;  软件 (×1.5)  &gt;  网络 (×1.0)  &gt;  账号 (×0.5)</a:t>
-            </a:r>
-          </a:p>
-          <a:p>
-            <a:pPr>
-              <a:spcAft>
-                <a:spcPts val="600"/>
-              </a:spcAft>
-              <a:defRPr sz="1600">
-                <a:solidFill>
-                  <a:srgbClr val="1E293B"/>
-                </a:solidFill>
-              </a:defRPr>
-            </a:pPr>
-          </a:p>
-          <a:p>
-            <a:pPr>
-              <a:spcAft>
-                <a:spcPts val="600"/>
-              </a:spcAft>
-              <a:defRPr sz="1600">
-                <a:solidFill>
-                  <a:srgbClr val="1E293B"/>
-                </a:solidFill>
-              </a:defRPr>
-            </a:pPr>
-            <a:r>
-              <a:t>提示：权重影响排行榜「加权件数」得分</a:t>
-            </a:r>
-          </a:p>
-        </p:txBody>
-      </p:sp>
-      <p:sp>
-        <p:nvSpPr>
-          <p:cNvPr id="4" name="TextBox 3"/>
+              <a:defRPr sz="1200" i="1">
+                <a:solidFill>
+                  <a:srgbClr val="6B7280"/>
+                </a:solidFill>
+              </a:defRPr>
+            </a:pPr>
+            <a:r>
+              <a:t>▲ 修改状态/指派/备注/附件/历史记录，工单全生命周期在此管理</a:t>
+            </a:r>
+          </a:p>
+        </p:txBody>
+      </p:sp>
+      <p:sp>
+        <p:nvSpPr>
+          <p:cNvPr id="5" name="TextBox 4"/>
           <p:cNvSpPr txBox="1"/>
           <p:nvPr/>
         </p:nvSpPr>
@@ -6667,7 +7019,7 @@
               </a:defRPr>
             </a:pPr>
             <a:r>
-              <a:t>03  工单列表与搜索</a:t>
+              <a:t>02  用户角色与权限</a:t>
             </a:r>
           </a:p>
         </p:txBody>
@@ -6705,139 +7057,181 @@
               </a:defRPr>
             </a:pPr>
             <a:r>
-              <a:t>📋 工单列表 (/tickets)</a:t>
-            </a:r>
-          </a:p>
-          <a:p>
-            <a:pPr>
-              <a:spcAft>
-                <a:spcPts val="600"/>
-              </a:spcAft>
-              <a:defRPr sz="1600">
-                <a:solidFill>
-                  <a:srgbClr val="1E293B"/>
-                </a:solidFill>
-              </a:defRPr>
-            </a:pPr>
-            <a:r>
-              <a:t>  • 状态标签筛选：全部 | 待处理 | 处理中 | 已升级 | 已完成 | 已取消</a:t>
-            </a:r>
-          </a:p>
-          <a:p>
-            <a:pPr>
-              <a:spcAft>
-                <a:spcPts val="600"/>
-              </a:spcAft>
-              <a:defRPr sz="1600">
-                <a:solidFill>
-                  <a:srgbClr val="1E293B"/>
-                </a:solidFill>
-              </a:defRPr>
-            </a:pPr>
-            <a:r>
-              <a:t>  • 全文搜索：支持按编号/标题/描述/创建人/指派人/状态搜索</a:t>
-            </a:r>
-          </a:p>
-          <a:p>
-            <a:pPr>
-              <a:spcAft>
-                <a:spcPts val="600"/>
-              </a:spcAft>
-              <a:defRPr sz="1600">
-                <a:solidFill>
-                  <a:srgbClr val="1E293B"/>
-                </a:solidFill>
-              </a:defRPr>
-            </a:pPr>
-          </a:p>
-          <a:p>
-            <a:pPr>
-              <a:spcAft>
-                <a:spcPts val="600"/>
-              </a:spcAft>
-              <a:defRPr sz="1600">
-                <a:solidFill>
-                  <a:srgbClr val="1E293B"/>
-                </a:solidFill>
-              </a:defRPr>
-            </a:pPr>
-            <a:r>
-              <a:t>工单详情页 (/tickets/{id})</a:t>
-            </a:r>
-          </a:p>
-          <a:p>
-            <a:pPr>
-              <a:spcAft>
-                <a:spcPts val="600"/>
-              </a:spcAft>
-              <a:defRPr sz="1600">
-                <a:solidFill>
-                  <a:srgbClr val="1E293B"/>
-                </a:solidFill>
-              </a:defRPr>
-            </a:pPr>
-            <a:r>
-              <a:t>  • 修改状态（下拉选择）</a:t>
-            </a:r>
-          </a:p>
-          <a:p>
-            <a:pPr>
-              <a:spcAft>
-                <a:spcPts val="600"/>
-              </a:spcAft>
-              <a:defRPr sz="1600">
-                <a:solidFill>
-                  <a:srgbClr val="1E293B"/>
-                </a:solidFill>
-              </a:defRPr>
-            </a:pPr>
-            <a:r>
-              <a:t>  • 修改指派人</a:t>
-            </a:r>
-          </a:p>
-          <a:p>
-            <a:pPr>
-              <a:spcAft>
-                <a:spcPts val="600"/>
-              </a:spcAft>
-              <a:defRPr sz="1600">
-                <a:solidFill>
-                  <a:srgbClr val="1E293B"/>
-                </a:solidFill>
-              </a:defRPr>
-            </a:pPr>
-            <a:r>
-              <a:t>  • 添加备注（支持粘贴图片）</a:t>
-            </a:r>
-          </a:p>
-          <a:p>
-            <a:pPr>
-              <a:spcAft>
-                <a:spcPts val="600"/>
-              </a:spcAft>
-              <a:defRPr sz="1600">
-                <a:solidFill>
-                  <a:srgbClr val="1E293B"/>
-                </a:solidFill>
-              </a:defRPr>
-            </a:pPr>
-            <a:r>
-              <a:t>  • 上传附件（PDF / Word / Excel / 图片 / ZIP）</a:t>
-            </a:r>
-          </a:p>
-          <a:p>
-            <a:pPr>
-              <a:spcAft>
-                <a:spcPts val="600"/>
-              </a:spcAft>
-              <a:defRPr sz="1600">
-                <a:solidFill>
-                  <a:srgbClr val="1E293B"/>
-                </a:solidFill>
-              </a:defRPr>
-            </a:pPr>
-            <a:r>
-              <a:t>  • 查看完整工单历史记录</a:t>
+              <a:t>🔧 系统管理员 (admin)</a:t>
+            </a:r>
+          </a:p>
+          <a:p>
+            <a:pPr>
+              <a:spcAft>
+                <a:spcPts val="600"/>
+              </a:spcAft>
+              <a:defRPr sz="1600">
+                <a:solidFill>
+                  <a:srgbClr val="1E293B"/>
+                </a:solidFill>
+              </a:defRPr>
+            </a:pPr>
+            <a:r>
+              <a:t>    • 管理用户账号（新增/编辑/启禁用）</a:t>
+            </a:r>
+          </a:p>
+          <a:p>
+            <a:pPr>
+              <a:spcAft>
+                <a:spcPts val="600"/>
+              </a:spcAft>
+              <a:defRPr sz="1600">
+                <a:solidFill>
+                  <a:srgbClr val="1E293B"/>
+                </a:solidFill>
+              </a:defRPr>
+            </a:pPr>
+            <a:r>
+              <a:t>    • 配置权限流转表、SLA 标准、工作日</a:t>
+            </a:r>
+          </a:p>
+          <a:p>
+            <a:pPr>
+              <a:spcAft>
+                <a:spcPts val="600"/>
+              </a:spcAft>
+              <a:defRPr sz="1600">
+                <a:solidFill>
+                  <a:srgbClr val="1E293B"/>
+                </a:solidFill>
+              </a:defRPr>
+            </a:pPr>
+            <a:r>
+              <a:t>    • 查看全部工单与仪表盘数据</a:t>
+            </a:r>
+          </a:p>
+          <a:p>
+            <a:pPr>
+              <a:spcAft>
+                <a:spcPts val="600"/>
+              </a:spcAft>
+              <a:defRPr sz="1600">
+                <a:solidFill>
+                  <a:srgbClr val="1E293B"/>
+                </a:solidFill>
+              </a:defRPr>
+            </a:pPr>
+          </a:p>
+          <a:p>
+            <a:pPr>
+              <a:spcAft>
+                <a:spcPts val="600"/>
+              </a:spcAft>
+              <a:defRPr sz="1600">
+                <a:solidFill>
+                  <a:srgbClr val="1E293B"/>
+                </a:solidFill>
+              </a:defRPr>
+            </a:pPr>
+            <a:r>
+              <a:t>👨‍💻 IT 人员 (it_staff)</a:t>
+            </a:r>
+          </a:p>
+          <a:p>
+            <a:pPr>
+              <a:spcAft>
+                <a:spcPts val="600"/>
+              </a:spcAft>
+              <a:defRPr sz="1600">
+                <a:solidFill>
+                  <a:srgbClr val="1E293B"/>
+                </a:solidFill>
+              </a:defRPr>
+            </a:pPr>
+            <a:r>
+              <a:t>    • 处理分配给自己的工单</a:t>
+            </a:r>
+          </a:p>
+          <a:p>
+            <a:pPr>
+              <a:spcAft>
+                <a:spcPts val="600"/>
+              </a:spcAft>
+              <a:defRPr sz="1600">
+                <a:solidFill>
+                  <a:srgbClr val="1E293B"/>
+                </a:solidFill>
+              </a:defRPr>
+            </a:pPr>
+            <a:r>
+              <a:t>    • 修改工单状态、添加备注、上传附件</a:t>
+            </a:r>
+          </a:p>
+          <a:p>
+            <a:pPr>
+              <a:spcAft>
+                <a:spcPts val="600"/>
+              </a:spcAft>
+              <a:defRPr sz="1600">
+                <a:solidFill>
+                  <a:srgbClr val="1E293B"/>
+                </a:solidFill>
+              </a:defRPr>
+            </a:pPr>
+            <a:r>
+              <a:t>    • 查看仪表盘（排行榜、热力图等）</a:t>
+            </a:r>
+          </a:p>
+          <a:p>
+            <a:pPr>
+              <a:spcAft>
+                <a:spcPts val="600"/>
+              </a:spcAft>
+              <a:defRPr sz="1600">
+                <a:solidFill>
+                  <a:srgbClr val="1E293B"/>
+                </a:solidFill>
+              </a:defRPr>
+            </a:pPr>
+          </a:p>
+          <a:p>
+            <a:pPr>
+              <a:spcAft>
+                <a:spcPts val="600"/>
+              </a:spcAft>
+              <a:defRPr sz="1600">
+                <a:solidFill>
+                  <a:srgbClr val="1E293B"/>
+                </a:solidFill>
+              </a:defRPr>
+            </a:pPr>
+            <a:r>
+              <a:t>👤 普通用户</a:t>
+            </a:r>
+          </a:p>
+          <a:p>
+            <a:pPr>
+              <a:spcAft>
+                <a:spcPts val="600"/>
+              </a:spcAft>
+              <a:defRPr sz="1600">
+                <a:solidFill>
+                  <a:srgbClr val="1E293B"/>
+                </a:solidFill>
+              </a:defRPr>
+            </a:pPr>
+            <a:r>
+              <a:t>    • 提交工单（标题/描述/分类/优先级）</a:t>
+            </a:r>
+          </a:p>
+          <a:p>
+            <a:pPr>
+              <a:spcAft>
+                <a:spcPts val="600"/>
+              </a:spcAft>
+              <a:defRPr sz="1600">
+                <a:solidFill>
+                  <a:srgbClr val="1E293B"/>
+                </a:solidFill>
+              </a:defRPr>
+            </a:pPr>
+            <a:r>
+              <a:t>    • 无需登录即可创建工单</a:t>
             </a:r>
           </a:p>
         </p:txBody>
@@ -6933,7 +7327,7 @@
               </a:defRPr>
             </a:pPr>
             <a:r>
-              <a:t>04  仪表盘（上）</a:t>
+              <a:t>04  工单生命周期</a:t>
             </a:r>
           </a:p>
         </p:txBody>
@@ -6971,148 +7365,178 @@
               </a:defRPr>
             </a:pPr>
             <a:r>
-              <a:t>📊 摘要卡片 — 今日新建 / 处理中 / 已完成 / SLA达标率</a:t>
-            </a:r>
-          </a:p>
-          <a:p>
-            <a:pPr>
-              <a:spcAft>
-                <a:spcPts val="600"/>
-              </a:spcAft>
-              <a:defRPr sz="1600">
-                <a:solidFill>
-                  <a:srgbClr val="1E293B"/>
-                </a:solidFill>
-              </a:defRPr>
-            </a:pPr>
-          </a:p>
-          <a:p>
-            <a:pPr>
-              <a:spcAft>
-                <a:spcPts val="600"/>
-              </a:spcAft>
-              <a:defRPr sz="1600">
-                <a:solidFill>
-                  <a:srgbClr val="1E293B"/>
-                </a:solidFill>
-              </a:defRPr>
-            </a:pPr>
-            <a:r>
-              <a:t>🏆 摘牌排行榜 — IT 人员月度评分排名</a:t>
-            </a:r>
-          </a:p>
-          <a:p>
-            <a:pPr>
-              <a:spcAft>
-                <a:spcPts val="600"/>
-              </a:spcAft>
-              <a:defRPr sz="1600">
-                <a:solidFill>
-                  <a:srgbClr val="1E293B"/>
-                </a:solidFill>
-              </a:defRPr>
-            </a:pPr>
-            <a:r>
-              <a:t>评分公式（满分 100）：</a:t>
-            </a:r>
-          </a:p>
-          <a:p>
-            <a:pPr>
-              <a:spcAft>
-                <a:spcPts val="600"/>
-              </a:spcAft>
-              <a:defRPr sz="1600">
-                <a:solidFill>
-                  <a:srgbClr val="1E293B"/>
-                </a:solidFill>
-              </a:defRPr>
-            </a:pPr>
-            <a:r>
-              <a:t>  加权(35) + SLA(25) + 速度(20) + 响应(5) + 接收(+2/件最高10) + 退回(5−1/件最高5)</a:t>
-            </a:r>
-          </a:p>
-          <a:p>
-            <a:pPr>
-              <a:spcAft>
-                <a:spcPts val="600"/>
-              </a:spcAft>
-              <a:defRPr sz="1600">
-                <a:solidFill>
-                  <a:srgbClr val="1E293B"/>
-                </a:solidFill>
-              </a:defRPr>
-            </a:pPr>
-            <a:r>
-              <a:t>  （升级已从排行榜移除，仅保留接收加分）</a:t>
-            </a:r>
-          </a:p>
-          <a:p>
-            <a:pPr>
-              <a:spcAft>
-                <a:spcPts val="600"/>
-              </a:spcAft>
-              <a:defRPr sz="1600">
-                <a:solidFill>
-                  <a:srgbClr val="1E293B"/>
-                </a:solidFill>
-              </a:defRPr>
-            </a:pPr>
-          </a:p>
-          <a:p>
-            <a:pPr>
-              <a:spcAft>
-                <a:spcPts val="600"/>
-              </a:spcAft>
-              <a:defRPr sz="1600">
-                <a:solidFill>
-                  <a:srgbClr val="1E293B"/>
-                </a:solidFill>
-              </a:defRPr>
-            </a:pPr>
-            <a:r>
-              <a:t>🔥 热力图 — 个人每日工作强度日历视图</a:t>
-            </a:r>
-          </a:p>
-          <a:p>
-            <a:pPr>
-              <a:spcAft>
-                <a:spcPts val="600"/>
-              </a:spcAft>
-              <a:defRPr sz="1600">
-                <a:solidFill>
-                  <a:srgbClr val="1E293B"/>
-                </a:solidFill>
-              </a:defRPr>
-            </a:pPr>
-            <a:r>
-              <a:t>  颜色深浅表示当天完成工单数量</a:t>
-            </a:r>
-          </a:p>
-          <a:p>
-            <a:pPr>
-              <a:spcAft>
-                <a:spcPts val="600"/>
-              </a:spcAft>
-              <a:defRPr sz="1600">
-                <a:solidFill>
-                  <a:srgbClr val="1E293B"/>
-                </a:solidFill>
-              </a:defRPr>
-            </a:pPr>
-          </a:p>
-          <a:p>
-            <a:pPr>
-              <a:spcAft>
-                <a:spcPts val="600"/>
-              </a:spcAft>
-              <a:defRPr sz="1600">
-                <a:solidFill>
-                  <a:srgbClr val="1E293B"/>
-                </a:solidFill>
-              </a:defRPr>
-            </a:pPr>
-            <a:r>
-              <a:t>⚖️ 工作负载 — 每个 IT 人员当前待处理工单（按优先级堆叠）</a:t>
+              <a:t>标准流程：</a:t>
+            </a:r>
+          </a:p>
+          <a:p>
+            <a:pPr>
+              <a:spcAft>
+                <a:spcPts val="600"/>
+              </a:spcAft>
+              <a:defRPr sz="1600">
+                <a:solidFill>
+                  <a:srgbClr val="1E293B"/>
+                </a:solidFill>
+              </a:defRPr>
+            </a:pPr>
+            <a:r>
+              <a:t>  待处理 ──→ 处理中 ──→ 已完成 ✅</a:t>
+            </a:r>
+          </a:p>
+          <a:p>
+            <a:pPr>
+              <a:spcAft>
+                <a:spcPts val="600"/>
+              </a:spcAft>
+              <a:defRPr sz="1600">
+                <a:solidFill>
+                  <a:srgbClr val="1E293B"/>
+                </a:solidFill>
+              </a:defRPr>
+            </a:pPr>
+          </a:p>
+          <a:p>
+            <a:pPr>
+              <a:spcAft>
+                <a:spcPts val="600"/>
+              </a:spcAft>
+              <a:defRPr sz="1600">
+                <a:solidFill>
+                  <a:srgbClr val="1E293B"/>
+                </a:solidFill>
+              </a:defRPr>
+            </a:pPr>
+            <a:r>
+              <a:t>升级流程：</a:t>
+            </a:r>
+          </a:p>
+          <a:p>
+            <a:pPr>
+              <a:spcAft>
+                <a:spcPts val="600"/>
+              </a:spcAft>
+              <a:defRPr sz="1600">
+                <a:solidFill>
+                  <a:srgbClr val="1E293B"/>
+                </a:solidFill>
+              </a:defRPr>
+            </a:pPr>
+            <a:r>
+              <a:t>  待处理 ──→ 处理中 ──→ 已升级 ──→ 已完成 ⬆️</a:t>
+            </a:r>
+          </a:p>
+          <a:p>
+            <a:pPr>
+              <a:spcAft>
+                <a:spcPts val="600"/>
+              </a:spcAft>
+              <a:defRPr sz="1600">
+                <a:solidFill>
+                  <a:srgbClr val="1E293B"/>
+                </a:solidFill>
+              </a:defRPr>
+            </a:pPr>
+            <a:r>
+              <a:t>             (指派他人处理)</a:t>
+            </a:r>
+          </a:p>
+          <a:p>
+            <a:pPr>
+              <a:spcAft>
+                <a:spcPts val="600"/>
+              </a:spcAft>
+              <a:defRPr sz="1600">
+                <a:solidFill>
+                  <a:srgbClr val="1E293B"/>
+                </a:solidFill>
+              </a:defRPr>
+            </a:pPr>
+          </a:p>
+          <a:p>
+            <a:pPr>
+              <a:spcAft>
+                <a:spcPts val="600"/>
+              </a:spcAft>
+              <a:defRPr sz="1600">
+                <a:solidFill>
+                  <a:srgbClr val="1E293B"/>
+                </a:solidFill>
+              </a:defRPr>
+            </a:pPr>
+            <a:r>
+              <a:t>退回流程：</a:t>
+            </a:r>
+          </a:p>
+          <a:p>
+            <a:pPr>
+              <a:spcAft>
+                <a:spcPts val="600"/>
+              </a:spcAft>
+              <a:defRPr sz="1600">
+                <a:solidFill>
+                  <a:srgbClr val="1E293B"/>
+                </a:solidFill>
+              </a:defRPr>
+            </a:pPr>
+            <a:r>
+              <a:t>  已完成 ──→ 处理中 ──→ 已完成 🔄</a:t>
+            </a:r>
+          </a:p>
+          <a:p>
+            <a:pPr>
+              <a:spcAft>
+                <a:spcPts val="600"/>
+              </a:spcAft>
+              <a:defRPr sz="1600">
+                <a:solidFill>
+                  <a:srgbClr val="1E293B"/>
+                </a:solidFill>
+              </a:defRPr>
+            </a:pPr>
+            <a:r>
+              <a:t>  (质量不合要求，退回重做)</a:t>
+            </a:r>
+          </a:p>
+          <a:p>
+            <a:pPr>
+              <a:spcAft>
+                <a:spcPts val="600"/>
+              </a:spcAft>
+              <a:defRPr sz="1600">
+                <a:solidFill>
+                  <a:srgbClr val="1E293B"/>
+                </a:solidFill>
+              </a:defRPr>
+            </a:pPr>
+          </a:p>
+          <a:p>
+            <a:pPr>
+              <a:spcAft>
+                <a:spcPts val="600"/>
+              </a:spcAft>
+              <a:defRPr sz="1600">
+                <a:solidFill>
+                  <a:srgbClr val="1E293B"/>
+                </a:solidFill>
+              </a:defRPr>
+            </a:pPr>
+            <a:r>
+              <a:t>取消流程：</a:t>
+            </a:r>
+          </a:p>
+          <a:p>
+            <a:pPr>
+              <a:spcAft>
+                <a:spcPts val="600"/>
+              </a:spcAft>
+              <a:defRPr sz="1600">
+                <a:solidFill>
+                  <a:srgbClr val="1E293B"/>
+                </a:solidFill>
+              </a:defRPr>
+            </a:pPr>
+            <a:r>
+              <a:t>  待处理 / 处理中 ──→ 已取消 ❌</a:t>
             </a:r>
           </a:p>
         </p:txBody>
@@ -7208,7 +7632,7 @@
               </a:defRPr>
             </a:pPr>
             <a:r>
-              <a:t>04  仪表盘（下）</a:t>
+              <a:t>04  创建工单演示</a:t>
             </a:r>
           </a:p>
         </p:txBody>
@@ -7246,154 +7670,178 @@
               </a:defRPr>
             </a:pPr>
             <a:r>
-              <a:t>📈 图表面板：</a:t>
-            </a:r>
-          </a:p>
-          <a:p>
-            <a:pPr>
-              <a:spcAft>
-                <a:spcPts val="600"/>
-              </a:spcAft>
-              <a:defRPr sz="1600">
-                <a:solidFill>
-                  <a:srgbClr val="1E293B"/>
-                </a:solidFill>
-              </a:defRPr>
-            </a:pPr>
-          </a:p>
-          <a:p>
-            <a:pPr>
-              <a:spcAft>
-                <a:spcPts val="600"/>
-              </a:spcAft>
-              <a:defRPr sz="1600">
-                <a:solidFill>
-                  <a:srgbClr val="1E293B"/>
-                </a:solidFill>
-              </a:defRPr>
-            </a:pPr>
-            <a:r>
-              <a:t>  ⚡ 分类·平均时长    — 各分类工单平均处理耗时</a:t>
-            </a:r>
-          </a:p>
-          <a:p>
-            <a:pPr>
-              <a:spcAft>
-                <a:spcPts val="600"/>
-              </a:spcAft>
-              <a:defRPr sz="1600">
-                <a:solidFill>
-                  <a:srgbClr val="1E293B"/>
-                </a:solidFill>
-              </a:defRPr>
-            </a:pPr>
-            <a:r>
-              <a:t>  📊 分类·专长度      — 每个 IT 人员的分类擅长分布</a:t>
-            </a:r>
-          </a:p>
-          <a:p>
-            <a:pPr>
-              <a:spcAft>
-                <a:spcPts val="600"/>
-              </a:spcAft>
-              <a:defRPr sz="1600">
-                <a:solidFill>
-                  <a:srgbClr val="1E293B"/>
-                </a:solidFill>
-              </a:defRPr>
-            </a:pPr>
-            <a:r>
-              <a:t>  😊 满意度           — 用户评价统计（仅统计启用IT人员）</a:t>
-            </a:r>
-          </a:p>
-          <a:p>
-            <a:pPr>
-              <a:spcAft>
-                <a:spcPts val="600"/>
-              </a:spcAft>
-              <a:defRPr sz="1600">
-                <a:solidFill>
-                  <a:srgbClr val="1E293B"/>
-                </a:solidFill>
-              </a:defRPr>
-            </a:pPr>
-            <a:r>
-              <a:t>  🎯 工单状态分布     — 饼图（待处理/处理中/已完成/已取消）</a:t>
-            </a:r>
-          </a:p>
-          <a:p>
-            <a:pPr>
-              <a:spcAft>
-                <a:spcPts val="600"/>
-              </a:spcAft>
-              <a:defRPr sz="1600">
-                <a:solidFill>
-                  <a:srgbClr val="1E293B"/>
-                </a:solidFill>
-              </a:defRPr>
-            </a:pPr>
-            <a:r>
-              <a:t>  📊 优先级·平均时长  — 各优先级工单平均耗时对比</a:t>
-            </a:r>
-          </a:p>
-          <a:p>
-            <a:pPr>
-              <a:spcAft>
-                <a:spcPts val="600"/>
-              </a:spcAft>
-              <a:defRPr sz="1600">
-                <a:solidFill>
-                  <a:srgbClr val="1E293B"/>
-                </a:solidFill>
-              </a:defRPr>
-            </a:pPr>
-            <a:r>
-              <a:t>  ⏱️ 首次响应分布     — 首次响应时间区间统计</a:t>
-            </a:r>
-          </a:p>
-          <a:p>
-            <a:pPr>
-              <a:spcAft>
-                <a:spcPts val="600"/>
-              </a:spcAft>
-              <a:defRPr sz="1600">
-                <a:solidFill>
-                  <a:srgbClr val="1E293B"/>
-                </a:solidFill>
-              </a:defRPr>
-            </a:pPr>
-            <a:r>
-              <a:t>  📈 月度对比         — 新建/完成/SLA/时长/响应 月度环比</a:t>
-            </a:r>
-          </a:p>
-          <a:p>
-            <a:pPr>
-              <a:spcAft>
-                <a:spcPts val="600"/>
-              </a:spcAft>
-              <a:defRPr sz="1600">
-                <a:solidFill>
-                  <a:srgbClr val="1E293B"/>
-                </a:solidFill>
-              </a:defRPr>
-            </a:pPr>
-            <a:r>
-              <a:t>  📈 工单流量         — 创建 vs 解决趋势折线图</a:t>
-            </a:r>
-          </a:p>
-          <a:p>
-            <a:pPr>
-              <a:spcAft>
-                <a:spcPts val="600"/>
-              </a:spcAft>
-              <a:defRPr sz="1600">
-                <a:solidFill>
-                  <a:srgbClr val="1E293B"/>
-                </a:solidFill>
-              </a:defRPr>
-            </a:pPr>
-            <a:r>
-              <a:t>  📊 SLA趋势          — SLA达标率月度变化</a:t>
+              <a:t>操作路径：导航栏 →  ➕ 创建工单</a:t>
+            </a:r>
+          </a:p>
+          <a:p>
+            <a:pPr>
+              <a:spcAft>
+                <a:spcPts val="600"/>
+              </a:spcAft>
+              <a:defRPr sz="1600">
+                <a:solidFill>
+                  <a:srgbClr val="1E293B"/>
+                </a:solidFill>
+              </a:defRPr>
+            </a:pPr>
+          </a:p>
+          <a:p>
+            <a:pPr>
+              <a:spcAft>
+                <a:spcPts val="600"/>
+              </a:spcAft>
+              <a:defRPr sz="1600">
+                <a:solidFill>
+                  <a:srgbClr val="1E293B"/>
+                </a:solidFill>
+              </a:defRPr>
+            </a:pPr>
+            <a:r>
+              <a:t>填写字段：</a:t>
+            </a:r>
+          </a:p>
+          <a:p>
+            <a:pPr>
+              <a:spcAft>
+                <a:spcPts val="600"/>
+              </a:spcAft>
+              <a:defRPr sz="1600">
+                <a:solidFill>
+                  <a:srgbClr val="1E293B"/>
+                </a:solidFill>
+              </a:defRPr>
+            </a:pPr>
+            <a:r>
+              <a:t>  📝 标题（必填）    — 简要描述问题</a:t>
+            </a:r>
+          </a:p>
+          <a:p>
+            <a:pPr>
+              <a:spcAft>
+                <a:spcPts val="600"/>
+              </a:spcAft>
+              <a:defRPr sz="1600">
+                <a:solidFill>
+                  <a:srgbClr val="1E293B"/>
+                </a:solidFill>
+              </a:defRPr>
+            </a:pPr>
+            <a:r>
+              <a:t>  📄 问题描述         — 详细说明，可直接粘贴截图</a:t>
+            </a:r>
+          </a:p>
+          <a:p>
+            <a:pPr>
+              <a:spcAft>
+                <a:spcPts val="600"/>
+              </a:spcAft>
+              <a:defRPr sz="1600">
+                <a:solidFill>
+                  <a:srgbClr val="1E293B"/>
+                </a:solidFill>
+              </a:defRPr>
+            </a:pPr>
+            <a:r>
+              <a:t>  📁 分类             — 硬件 / 软件 / 网络 / 账号 / 其他</a:t>
+            </a:r>
+          </a:p>
+          <a:p>
+            <a:pPr>
+              <a:spcAft>
+                <a:spcPts val="600"/>
+              </a:spcAft>
+              <a:defRPr sz="1600">
+                <a:solidFill>
+                  <a:srgbClr val="1E293B"/>
+                </a:solidFill>
+              </a:defRPr>
+            </a:pPr>
+            <a:r>
+              <a:t>  ⚡ 优先级           — 低 / 中 / 高 / 紧急</a:t>
+            </a:r>
+          </a:p>
+          <a:p>
+            <a:pPr>
+              <a:spcAft>
+                <a:spcPts val="600"/>
+              </a:spcAft>
+              <a:defRPr sz="1600">
+                <a:solidFill>
+                  <a:srgbClr val="1E293B"/>
+                </a:solidFill>
+              </a:defRPr>
+            </a:pPr>
+            <a:r>
+              <a:t>  👤 您的姓名         — 创建人</a:t>
+            </a:r>
+          </a:p>
+          <a:p>
+            <a:pPr>
+              <a:spcAft>
+                <a:spcPts val="600"/>
+              </a:spcAft>
+              <a:defRPr sz="1600">
+                <a:solidFill>
+                  <a:srgbClr val="1E293B"/>
+                </a:solidFill>
+              </a:defRPr>
+            </a:pPr>
+          </a:p>
+          <a:p>
+            <a:pPr>
+              <a:spcAft>
+                <a:spcPts val="600"/>
+              </a:spcAft>
+              <a:defRPr sz="1600">
+                <a:solidFill>
+                  <a:srgbClr val="1E293B"/>
+                </a:solidFill>
+              </a:defRPr>
+            </a:pPr>
+            <a:r>
+              <a:t>分类与权重：</a:t>
+            </a:r>
+          </a:p>
+          <a:p>
+            <a:pPr>
+              <a:spcAft>
+                <a:spcPts val="600"/>
+              </a:spcAft>
+              <a:defRPr sz="1600">
+                <a:solidFill>
+                  <a:srgbClr val="1E293B"/>
+                </a:solidFill>
+              </a:defRPr>
+            </a:pPr>
+            <a:r>
+              <a:t>  硬件 (×2.0)  &gt;  软件 (×1.5)  &gt;  网络 (×1.0)  &gt;  账号 (×0.5)</a:t>
+            </a:r>
+          </a:p>
+          <a:p>
+            <a:pPr>
+              <a:spcAft>
+                <a:spcPts val="600"/>
+              </a:spcAft>
+              <a:defRPr sz="1600">
+                <a:solidFill>
+                  <a:srgbClr val="1E293B"/>
+                </a:solidFill>
+              </a:defRPr>
+            </a:pPr>
+          </a:p>
+          <a:p>
+            <a:pPr>
+              <a:spcAft>
+                <a:spcPts val="600"/>
+              </a:spcAft>
+              <a:defRPr sz="1600">
+                <a:solidFill>
+                  <a:srgbClr val="1E293B"/>
+                </a:solidFill>
+              </a:defRPr>
+            </a:pPr>
+            <a:r>
+              <a:t>提示：权重影响排行榜「加权件数」得分</a:t>
             </a:r>
           </a:p>
         </p:txBody>
